--- a/presentation/Three-Tier-Cloud-Architecture-Deployment.pptx
+++ b/presentation/Three-Tier-Cloud-Architecture-Deployment.pptx
@@ -5,10 +5,10 @@
     <p:sldMasterId id="2147483648" r:id="rId4"/>
   </p:sldMasterIdLst>
   <p:notesMasterIdLst>
-    <p:notesMasterId r:id="rId26"/>
+    <p:notesMasterId r:id="rId25"/>
   </p:notesMasterIdLst>
   <p:handoutMasterIdLst>
-    <p:handoutMasterId r:id="rId27"/>
+    <p:handoutMasterId r:id="rId26"/>
   </p:handoutMasterIdLst>
   <p:sldIdLst>
     <p:sldId id="292" r:id="rId5"/>
@@ -17,21 +17,20 @@
     <p:sldId id="261" r:id="rId8"/>
     <p:sldId id="301" r:id="rId9"/>
     <p:sldId id="304" r:id="rId10"/>
-    <p:sldId id="303" r:id="rId11"/>
-    <p:sldId id="302" r:id="rId12"/>
-    <p:sldId id="298" r:id="rId13"/>
-    <p:sldId id="293" r:id="rId14"/>
-    <p:sldId id="305" r:id="rId15"/>
-    <p:sldId id="306" r:id="rId16"/>
-    <p:sldId id="307" r:id="rId17"/>
-    <p:sldId id="300" r:id="rId18"/>
-    <p:sldId id="269" r:id="rId19"/>
-    <p:sldId id="295" r:id="rId20"/>
-    <p:sldId id="308" r:id="rId21"/>
-    <p:sldId id="309" r:id="rId22"/>
-    <p:sldId id="310" r:id="rId23"/>
-    <p:sldId id="311" r:id="rId24"/>
-    <p:sldId id="289" r:id="rId25"/>
+    <p:sldId id="302" r:id="rId11"/>
+    <p:sldId id="298" r:id="rId12"/>
+    <p:sldId id="293" r:id="rId13"/>
+    <p:sldId id="305" r:id="rId14"/>
+    <p:sldId id="306" r:id="rId15"/>
+    <p:sldId id="307" r:id="rId16"/>
+    <p:sldId id="300" r:id="rId17"/>
+    <p:sldId id="269" r:id="rId18"/>
+    <p:sldId id="295" r:id="rId19"/>
+    <p:sldId id="308" r:id="rId20"/>
+    <p:sldId id="309" r:id="rId21"/>
+    <p:sldId id="310" r:id="rId22"/>
+    <p:sldId id="311" r:id="rId23"/>
+    <p:sldId id="289" r:id="rId24"/>
   </p:sldIdLst>
   <p:sldSz cx="12192000" cy="6858000"/>
   <p:notesSz cx="6858000" cy="9144000"/>
@@ -252,7 +251,7 @@
           <a:p>
             <a:fld id="{8CD26A2A-0A96-0647-84E5-C82F2EFD9474}" type="datetimeFigureOut">
               <a:rPr lang="en-US" smtClean="0"/>
-              <a:t>7/25/2026</a:t>
+              <a:t>7/27/2026</a:t>
             </a:fld>
             <a:endParaRPr lang="en-US" dirty="0"/>
           </a:p>
@@ -517,7 +516,7 @@
           <a:p>
             <a:fld id="{5B0CF20C-6BCC-41A4-8C16-5A346425718D}" type="datetimeFigureOut">
               <a:rPr lang="en-US" smtClean="0"/>
-              <a:t>7/25/2026</a:t>
+              <a:t>7/27/2026</a:t>
             </a:fld>
             <a:endParaRPr lang="en-US" dirty="0"/>
           </a:p>
@@ -1061,7 +1060,7 @@
           <a:p>
             <a:fld id="{017105BD-6D6F-49DB-9DE4-D4A6452D7E5F}" type="slidenum">
               <a:rPr lang="en-US" altLang="zh-CN" noProof="0" smtClean="0"/>
-              <a:t>10</a:t>
+              <a:t>9</a:t>
             </a:fld>
             <a:endParaRPr lang="en-US" altLang="zh-CN" noProof="0" dirty="0"/>
           </a:p>
@@ -1193,7 +1192,7 @@
           <a:p>
             <a:fld id="{017105BD-6D6F-49DB-9DE4-D4A6452D7E5F}" type="slidenum">
               <a:rPr lang="en-US" altLang="zh-CN" noProof="0" smtClean="0"/>
-              <a:t>11</a:t>
+              <a:t>10</a:t>
             </a:fld>
             <a:endParaRPr lang="en-US" altLang="zh-CN" noProof="0" dirty="0"/>
           </a:p>
@@ -1325,7 +1324,7 @@
           <a:p>
             <a:fld id="{017105BD-6D6F-49DB-9DE4-D4A6452D7E5F}" type="slidenum">
               <a:rPr lang="en-US" altLang="zh-CN" noProof="0" smtClean="0"/>
-              <a:t>12</a:t>
+              <a:t>11</a:t>
             </a:fld>
             <a:endParaRPr lang="en-US" altLang="zh-CN" noProof="0" dirty="0"/>
           </a:p>
@@ -1457,7 +1456,7 @@
           <a:p>
             <a:fld id="{017105BD-6D6F-49DB-9DE4-D4A6452D7E5F}" type="slidenum">
               <a:rPr lang="en-US" altLang="zh-CN" noProof="0" smtClean="0"/>
-              <a:t>13</a:t>
+              <a:t>12</a:t>
             </a:fld>
             <a:endParaRPr lang="en-US" altLang="zh-CN" noProof="0" dirty="0"/>
           </a:p>
@@ -1565,7 +1564,7 @@
           <a:p>
             <a:fld id="{017105BD-6D6F-49DB-9DE4-D4A6452D7E5F}" type="slidenum">
               <a:rPr lang="en-US" altLang="zh-CN" smtClean="0"/>
-              <a:t>16</a:t>
+              <a:t>15</a:t>
             </a:fld>
             <a:endParaRPr lang="en-US" altLang="zh-CN" dirty="0"/>
           </a:p>
@@ -1697,7 +1696,7 @@
           <a:p>
             <a:fld id="{017105BD-6D6F-49DB-9DE4-D4A6452D7E5F}" type="slidenum">
               <a:rPr lang="en-US" altLang="zh-CN" smtClean="0"/>
-              <a:t>18</a:t>
+              <a:t>17</a:t>
             </a:fld>
             <a:endParaRPr lang="en-US" altLang="zh-CN" dirty="0"/>
           </a:p>
@@ -1805,7 +1804,7 @@
           <a:p>
             <a:fld id="{017105BD-6D6F-49DB-9DE4-D4A6452D7E5F}" type="slidenum">
               <a:rPr lang="en-US" altLang="zh-CN" noProof="0" smtClean="0"/>
-              <a:t>21</a:t>
+              <a:t>20</a:t>
             </a:fld>
             <a:endParaRPr lang="en-US" altLang="zh-CN" noProof="0" dirty="0"/>
           </a:p>
@@ -14363,7 +14362,13 @@
   <p:cSld>
     <p:spTree>
       <p:nvGrpSpPr>
-        <p:cNvPr id="1" name=""/>
+        <p:cNvPr id="1" name="">
+          <a:extLst>
+            <a:ext uri="{FF2B5EF4-FFF2-40B4-BE49-F238E27FC236}">
+              <a16:creationId xmlns:a16="http://schemas.microsoft.com/office/drawing/2014/main" id="{D0B02FC7-AB21-B039-F0FB-3EF1974C81ED}"/>
+            </a:ext>
+          </a:extLst>
+        </p:cNvPr>
         <p:cNvGrpSpPr/>
         <p:nvPr/>
       </p:nvGrpSpPr>
@@ -14380,7 +14385,7 @@
           <p:cNvPr id="60" name="Title 59">
             <a:extLst>
               <a:ext uri="{FF2B5EF4-FFF2-40B4-BE49-F238E27FC236}">
-                <a16:creationId xmlns:a16="http://schemas.microsoft.com/office/drawing/2014/main" id="{0031CE36-F77D-3964-C169-771DBA49D28A}"/>
+                <a16:creationId xmlns:a16="http://schemas.microsoft.com/office/drawing/2014/main" id="{B1D53485-2BD3-0057-9173-E0DA839FF290}"/>
               </a:ext>
             </a:extLst>
           </p:cNvPr>
@@ -14405,7 +14410,7 @@
           <a:p>
             <a:r>
               <a:rPr lang="en-US" dirty="0"/>
-              <a:t>Application Instance stars unhealthy</a:t>
+              <a:t>Application not running on restart</a:t>
             </a:r>
           </a:p>
         </p:txBody>
@@ -14415,7 +14420,7 @@
           <p:cNvPr id="43" name="Text Placeholder 42">
             <a:extLst>
               <a:ext uri="{FF2B5EF4-FFF2-40B4-BE49-F238E27FC236}">
-                <a16:creationId xmlns:a16="http://schemas.microsoft.com/office/drawing/2014/main" id="{520E98B6-7B33-8FD4-A662-31DD4B85E22E}"/>
+                <a16:creationId xmlns:a16="http://schemas.microsoft.com/office/drawing/2014/main" id="{9FBC47D9-4E5A-0AD4-1ED9-F4B20089D218}"/>
               </a:ext>
             </a:extLst>
           </p:cNvPr>
@@ -14438,7 +14443,7 @@
           <a:p>
             <a:r>
               <a:rPr lang="en-US" dirty="0"/>
-              <a:t>Application server is marked as unhealthy at the first start.</a:t>
+              <a:t>Application is not running again after restarting. A manual restart of the application is needed..</a:t>
             </a:r>
           </a:p>
         </p:txBody>
@@ -14448,7 +14453,7 @@
           <p:cNvPr id="44" name="Text Placeholder 43">
             <a:extLst>
               <a:ext uri="{FF2B5EF4-FFF2-40B4-BE49-F238E27FC236}">
-                <a16:creationId xmlns:a16="http://schemas.microsoft.com/office/drawing/2014/main" id="{78466807-A2DA-EC5D-ACDE-B83D6F7169EA}"/>
+                <a16:creationId xmlns:a16="http://schemas.microsoft.com/office/drawing/2014/main" id="{3C7881A2-F1A1-4C69-83E9-E23DC8787D03}"/>
               </a:ext>
             </a:extLst>
           </p:cNvPr>
@@ -14461,8 +14466,8 @@
         </p:nvSpPr>
         <p:spPr>
           <a:xfrm>
-            <a:off x="1020535" y="4686300"/>
-            <a:ext cx="8254093" cy="1632857"/>
+            <a:off x="914399" y="2530928"/>
+            <a:ext cx="8360229" cy="555825"/>
           </a:xfrm>
         </p:spPr>
         <p:txBody>
@@ -14476,148 +14481,6 @@
               <a:t>Solution</a:t>
             </a:r>
           </a:p>
-          <a:p>
-            <a:pPr>
-              <a:spcBef>
-                <a:spcPts val="600"/>
-              </a:spcBef>
-            </a:pPr>
-            <a:r>
-              <a:rPr lang="en-US" sz="1600" dirty="0"/>
-              <a:t>Run bash </a:t>
-            </a:r>
-            <a:r>
-              <a:rPr lang="en-US" sz="1200" dirty="0" err="1">
-                <a:latin typeface="Calibri Light" panose="020F0302020204030204" pitchFamily="34" charset="0"/>
-                <a:ea typeface="Calibri Light" panose="020F0302020204030204" pitchFamily="34" charset="0"/>
-                <a:cs typeface="Calibri Light" panose="020F0302020204030204" pitchFamily="34" charset="0"/>
-              </a:rPr>
-              <a:t>npm</a:t>
-            </a:r>
-            <a:r>
-              <a:rPr lang="en-US" sz="1200" dirty="0">
-                <a:latin typeface="Calibri Light" panose="020F0302020204030204" pitchFamily="34" charset="0"/>
-                <a:ea typeface="Calibri Light" panose="020F0302020204030204" pitchFamily="34" charset="0"/>
-                <a:cs typeface="Calibri Light" panose="020F0302020204030204" pitchFamily="34" charset="0"/>
-              </a:rPr>
-              <a:t> install </a:t>
-            </a:r>
-            <a:r>
-              <a:rPr lang="en-US" sz="1200" dirty="0" err="1">
-                <a:latin typeface="Calibri Light" panose="020F0302020204030204" pitchFamily="34" charset="0"/>
-                <a:ea typeface="Calibri Light" panose="020F0302020204030204" pitchFamily="34" charset="0"/>
-                <a:cs typeface="Calibri Light" panose="020F0302020204030204" pitchFamily="34" charset="0"/>
-              </a:rPr>
-              <a:t>pg</a:t>
-            </a:r>
-            <a:r>
-              <a:rPr lang="en-US" sz="1200" dirty="0">
-                <a:latin typeface="Calibri Light" panose="020F0302020204030204" pitchFamily="34" charset="0"/>
-                <a:ea typeface="Calibri Light" panose="020F0302020204030204" pitchFamily="34" charset="0"/>
-                <a:cs typeface="Calibri Light" panose="020F0302020204030204" pitchFamily="34" charset="0"/>
-              </a:rPr>
-              <a:t> </a:t>
-            </a:r>
-            <a:r>
-              <a:rPr lang="en-US" sz="1600" dirty="0"/>
-              <a:t>to install the dependency needed. </a:t>
-            </a:r>
-          </a:p>
-          <a:p>
-            <a:pPr>
-              <a:spcBef>
-                <a:spcPts val="600"/>
-              </a:spcBef>
-            </a:pPr>
-            <a:r>
-              <a:rPr lang="en-US" sz="1600" dirty="0"/>
-              <a:t>Run bash </a:t>
-            </a:r>
-            <a:r>
-              <a:rPr lang="en-US" sz="1200" dirty="0" err="1">
-                <a:latin typeface="Calibri Light" panose="020F0302020204030204" pitchFamily="34" charset="0"/>
-                <a:ea typeface="Calibri Light" panose="020F0302020204030204" pitchFamily="34" charset="0"/>
-                <a:cs typeface="Calibri Light" panose="020F0302020204030204" pitchFamily="34" charset="0"/>
-              </a:rPr>
-              <a:t>sudo</a:t>
-            </a:r>
-            <a:r>
-              <a:rPr lang="en-US" sz="1200" dirty="0">
-                <a:latin typeface="Calibri Light" panose="020F0302020204030204" pitchFamily="34" charset="0"/>
-                <a:ea typeface="Calibri Light" panose="020F0302020204030204" pitchFamily="34" charset="0"/>
-                <a:cs typeface="Calibri Light" panose="020F0302020204030204" pitchFamily="34" charset="0"/>
-              </a:rPr>
-              <a:t> </a:t>
-            </a:r>
-            <a:r>
-              <a:rPr lang="en-US" sz="1200" dirty="0" err="1">
-                <a:latin typeface="Calibri Light" panose="020F0302020204030204" pitchFamily="34" charset="0"/>
-                <a:ea typeface="Calibri Light" panose="020F0302020204030204" pitchFamily="34" charset="0"/>
-                <a:cs typeface="Calibri Light" panose="020F0302020204030204" pitchFamily="34" charset="0"/>
-              </a:rPr>
-              <a:t>chmod</a:t>
-            </a:r>
-            <a:r>
-              <a:rPr lang="en-US" sz="1200" dirty="0">
-                <a:latin typeface="Calibri Light" panose="020F0302020204030204" pitchFamily="34" charset="0"/>
-                <a:ea typeface="Calibri Light" panose="020F0302020204030204" pitchFamily="34" charset="0"/>
-                <a:cs typeface="Calibri Light" panose="020F0302020204030204" pitchFamily="34" charset="0"/>
-              </a:rPr>
-              <a:t> 777 app.log </a:t>
-            </a:r>
-            <a:r>
-              <a:rPr lang="en-US" sz="1600" dirty="0"/>
-              <a:t>to allow edition of app.log file. </a:t>
-            </a:r>
-          </a:p>
-          <a:p>
-            <a:pPr>
-              <a:spcBef>
-                <a:spcPts val="600"/>
-              </a:spcBef>
-            </a:pPr>
-            <a:r>
-              <a:rPr lang="en-US" sz="1600" dirty="0"/>
-              <a:t>Run the application using the command </a:t>
-            </a:r>
-            <a:r>
-              <a:rPr lang="en-US" sz="1200" dirty="0" err="1">
-                <a:latin typeface="Calibri Light" panose="020F0302020204030204" pitchFamily="34" charset="0"/>
-                <a:ea typeface="Calibri Light" panose="020F0302020204030204" pitchFamily="34" charset="0"/>
-                <a:cs typeface="Calibri Light" panose="020F0302020204030204" pitchFamily="34" charset="0"/>
-              </a:rPr>
-              <a:t>sudo</a:t>
-            </a:r>
-            <a:r>
-              <a:rPr lang="en-US" sz="1200" dirty="0">
-                <a:latin typeface="Calibri Light" panose="020F0302020204030204" pitchFamily="34" charset="0"/>
-                <a:ea typeface="Calibri Light" panose="020F0302020204030204" pitchFamily="34" charset="0"/>
-                <a:cs typeface="Calibri Light" panose="020F0302020204030204" pitchFamily="34" charset="0"/>
-              </a:rPr>
-              <a:t> </a:t>
-            </a:r>
-            <a:r>
-              <a:rPr lang="en-US" sz="1200" dirty="0" err="1">
-                <a:latin typeface="Calibri Light" panose="020F0302020204030204" pitchFamily="34" charset="0"/>
-                <a:ea typeface="Calibri Light" panose="020F0302020204030204" pitchFamily="34" charset="0"/>
-                <a:cs typeface="Calibri Light" panose="020F0302020204030204" pitchFamily="34" charset="0"/>
-              </a:rPr>
-              <a:t>nohup</a:t>
-            </a:r>
-            <a:r>
-              <a:rPr lang="en-US" sz="1200" dirty="0">
-                <a:latin typeface="Calibri Light" panose="020F0302020204030204" pitchFamily="34" charset="0"/>
-                <a:ea typeface="Calibri Light" panose="020F0302020204030204" pitchFamily="34" charset="0"/>
-                <a:cs typeface="Calibri Light" panose="020F0302020204030204" pitchFamily="34" charset="0"/>
-              </a:rPr>
-              <a:t> node server.js &gt; app.log 2&gt;&amp;1 &amp;.</a:t>
-            </a:r>
-            <a:endParaRPr lang="en-US" sz="1600" dirty="0">
-              <a:latin typeface="Calibri Light" panose="020F0302020204030204" pitchFamily="34" charset="0"/>
-              <a:ea typeface="Calibri Light" panose="020F0302020204030204" pitchFamily="34" charset="0"/>
-              <a:cs typeface="Calibri Light" panose="020F0302020204030204" pitchFamily="34" charset="0"/>
-            </a:endParaRPr>
-          </a:p>
         </p:txBody>
       </p:sp>
       <p:sp>
@@ -14625,7 +14488,7 @@
           <p:cNvPr id="11" name="Slide Number Placeholder 13">
             <a:extLst>
               <a:ext uri="{FF2B5EF4-FFF2-40B4-BE49-F238E27FC236}">
-                <a16:creationId xmlns:a16="http://schemas.microsoft.com/office/drawing/2014/main" id="{930FF33C-2E3C-37EC-75C2-1BE4513D9B62}"/>
+                <a16:creationId xmlns:a16="http://schemas.microsoft.com/office/drawing/2014/main" id="{848E6BFE-2BB3-B86F-2060-1C16CDB36DBC}"/>
               </a:ext>
             </a:extLst>
           </p:cNvPr>
@@ -14808,7 +14671,7 @@
           <p:cNvPr id="2" name="Slide Number Placeholder 1">
             <a:extLst>
               <a:ext uri="{FF2B5EF4-FFF2-40B4-BE49-F238E27FC236}">
-                <a16:creationId xmlns:a16="http://schemas.microsoft.com/office/drawing/2014/main" id="{2222DE72-77CB-CB24-A4D1-2FAC47307AC9}"/>
+                <a16:creationId xmlns:a16="http://schemas.microsoft.com/office/drawing/2014/main" id="{0AF8E237-9955-B45F-452A-EDC02FAFAC82}"/>
               </a:ext>
             </a:extLst>
           </p:cNvPr>
@@ -14835,10 +14698,10 @@
       </p:sp>
       <p:pic>
         <p:nvPicPr>
-          <p:cNvPr id="4" name="Picture 3">
+          <p:cNvPr id="5" name="Picture 4">
             <a:extLst>
               <a:ext uri="{FF2B5EF4-FFF2-40B4-BE49-F238E27FC236}">
-                <a16:creationId xmlns:a16="http://schemas.microsoft.com/office/drawing/2014/main" id="{0E711349-552F-AFBF-5390-82AC959C3741}"/>
+                <a16:creationId xmlns:a16="http://schemas.microsoft.com/office/drawing/2014/main" id="{874C4A89-760F-5EC9-383D-278B5186D54D}"/>
               </a:ext>
             </a:extLst>
           </p:cNvPr>
@@ -14855,8 +14718,8 @@
         </p:blipFill>
         <p:spPr>
           <a:xfrm>
-            <a:off x="1096223" y="2171700"/>
-            <a:ext cx="5312741" cy="2422390"/>
+            <a:off x="914399" y="3135738"/>
+            <a:ext cx="6457951" cy="3306931"/>
           </a:xfrm>
           <a:prstGeom prst="rect">
             <a:avLst/>
@@ -14866,7 +14729,7 @@
     </p:spTree>
     <p:extLst>
       <p:ext uri="{BB962C8B-B14F-4D97-AF65-F5344CB8AC3E}">
-        <p14:creationId xmlns:p14="http://schemas.microsoft.com/office/powerpoint/2010/main" val="4182148033"/>
+        <p14:creationId xmlns:p14="http://schemas.microsoft.com/office/powerpoint/2010/main" val="865760638"/>
       </p:ext>
     </p:extLst>
   </p:cSld>
@@ -14884,7 +14747,7 @@
         <p:cNvPr id="1" name="">
           <a:extLst>
             <a:ext uri="{FF2B5EF4-FFF2-40B4-BE49-F238E27FC236}">
-              <a16:creationId xmlns:a16="http://schemas.microsoft.com/office/drawing/2014/main" id="{D0B02FC7-AB21-B039-F0FB-3EF1974C81ED}"/>
+              <a16:creationId xmlns:a16="http://schemas.microsoft.com/office/drawing/2014/main" id="{3EB86378-DCF5-D0B3-3573-F75CB840221C}"/>
             </a:ext>
           </a:extLst>
         </p:cNvPr>
@@ -14904,7 +14767,7 @@
           <p:cNvPr id="60" name="Title 59">
             <a:extLst>
               <a:ext uri="{FF2B5EF4-FFF2-40B4-BE49-F238E27FC236}">
-                <a16:creationId xmlns:a16="http://schemas.microsoft.com/office/drawing/2014/main" id="{B1D53485-2BD3-0057-9173-E0DA839FF290}"/>
+                <a16:creationId xmlns:a16="http://schemas.microsoft.com/office/drawing/2014/main" id="{3A65C8D5-10F0-4AA7-16FB-ABB5CAB91FCA}"/>
               </a:ext>
             </a:extLst>
           </p:cNvPr>
@@ -14929,7 +14792,7 @@
           <a:p>
             <a:r>
               <a:rPr lang="en-US" dirty="0"/>
-              <a:t>Application not running on restart</a:t>
+              <a:t>Host key verification failed</a:t>
             </a:r>
           </a:p>
         </p:txBody>
@@ -14939,7 +14802,7 @@
           <p:cNvPr id="43" name="Text Placeholder 42">
             <a:extLst>
               <a:ext uri="{FF2B5EF4-FFF2-40B4-BE49-F238E27FC236}">
-                <a16:creationId xmlns:a16="http://schemas.microsoft.com/office/drawing/2014/main" id="{9FBC47D9-4E5A-0AD4-1ED9-F4B20089D218}"/>
+                <a16:creationId xmlns:a16="http://schemas.microsoft.com/office/drawing/2014/main" id="{2C3D1BF0-D6C8-91EF-CA1F-B841F2248083}"/>
               </a:ext>
             </a:extLst>
           </p:cNvPr>
@@ -14962,7 +14825,7 @@
           <a:p>
             <a:r>
               <a:rPr lang="en-US" dirty="0"/>
-              <a:t>Application is not running again after restarting. A manual restart of the application is needed..</a:t>
+              <a:t>Database connection through bastion refused due to warning "Remote host identification has changed!"</a:t>
             </a:r>
           </a:p>
         </p:txBody>
@@ -14972,7 +14835,7 @@
           <p:cNvPr id="44" name="Text Placeholder 43">
             <a:extLst>
               <a:ext uri="{FF2B5EF4-FFF2-40B4-BE49-F238E27FC236}">
-                <a16:creationId xmlns:a16="http://schemas.microsoft.com/office/drawing/2014/main" id="{3C7881A2-F1A1-4C69-83E9-E23DC8787D03}"/>
+                <a16:creationId xmlns:a16="http://schemas.microsoft.com/office/drawing/2014/main" id="{2AF78A4B-325C-B4DE-8BF1-512F709C0F35}"/>
               </a:ext>
             </a:extLst>
           </p:cNvPr>
@@ -14985,8 +14848,8 @@
         </p:nvSpPr>
         <p:spPr>
           <a:xfrm>
-            <a:off x="914399" y="2530928"/>
-            <a:ext cx="8360229" cy="555825"/>
+            <a:off x="914399" y="4939393"/>
+            <a:ext cx="8360229" cy="1510393"/>
           </a:xfrm>
         </p:spPr>
         <p:txBody>
@@ -15000,6 +14863,33 @@
               <a:t>Solution</a:t>
             </a:r>
           </a:p>
+          <a:p>
+            <a:r>
+              <a:rPr lang="en-US" dirty="0"/>
+              <a:t>Run </a:t>
+            </a:r>
+            <a:r>
+              <a:rPr lang="en-US" sz="1200" dirty="0">
+                <a:latin typeface="Calibri Light" panose="020F0302020204030204" pitchFamily="34" charset="0"/>
+                <a:ea typeface="Calibri Light" panose="020F0302020204030204" pitchFamily="34" charset="0"/>
+                <a:cs typeface="Calibri Light" panose="020F0302020204030204" pitchFamily="34" charset="0"/>
+              </a:rPr>
+              <a:t>ssh-keygen -R DB-PRIVATE-IP  </a:t>
+            </a:r>
+            <a:r>
+              <a:rPr lang="en-US" dirty="0"/>
+              <a:t>to remove any key that the </a:t>
+            </a:r>
+            <a:r>
+              <a:rPr lang="en-US" dirty="0" err="1"/>
+              <a:t>db</a:t>
+            </a:r>
+            <a:r>
+              <a:rPr lang="en-US" dirty="0"/>
+              <a:t> IP address may have attached.</a:t>
+            </a:r>
+            <a:endParaRPr lang="en-US" sz="3200" b="1" dirty="0"/>
+          </a:p>
         </p:txBody>
       </p:sp>
       <p:sp>
@@ -15007,7 +14897,7 @@
           <p:cNvPr id="11" name="Slide Number Placeholder 13">
             <a:extLst>
               <a:ext uri="{FF2B5EF4-FFF2-40B4-BE49-F238E27FC236}">
-                <a16:creationId xmlns:a16="http://schemas.microsoft.com/office/drawing/2014/main" id="{848E6BFE-2BB3-B86F-2060-1C16CDB36DBC}"/>
+                <a16:creationId xmlns:a16="http://schemas.microsoft.com/office/drawing/2014/main" id="{5D0B3CCF-4FC9-C757-CD82-CDFFD44AC6D2}"/>
               </a:ext>
             </a:extLst>
           </p:cNvPr>
@@ -15190,7 +15080,7 @@
           <p:cNvPr id="2" name="Slide Number Placeholder 1">
             <a:extLst>
               <a:ext uri="{FF2B5EF4-FFF2-40B4-BE49-F238E27FC236}">
-                <a16:creationId xmlns:a16="http://schemas.microsoft.com/office/drawing/2014/main" id="{0AF8E237-9955-B45F-452A-EDC02FAFAC82}"/>
+                <a16:creationId xmlns:a16="http://schemas.microsoft.com/office/drawing/2014/main" id="{CB562DED-B4F1-14AE-58D0-60F327E13763}"/>
               </a:ext>
             </a:extLst>
           </p:cNvPr>
@@ -15217,10 +15107,10 @@
       </p:sp>
       <p:pic>
         <p:nvPicPr>
-          <p:cNvPr id="5" name="Picture 4">
+          <p:cNvPr id="3" name="Picture 2" descr="ts-host-key-changed.png">
             <a:extLst>
               <a:ext uri="{FF2B5EF4-FFF2-40B4-BE49-F238E27FC236}">
-                <a16:creationId xmlns:a16="http://schemas.microsoft.com/office/drawing/2014/main" id="{874C4A89-760F-5EC9-383D-278B5186D54D}"/>
+                <a16:creationId xmlns:a16="http://schemas.microsoft.com/office/drawing/2014/main" id="{DAE477CC-5A51-DE5E-1E27-B5B8CAE72247}"/>
               </a:ext>
             </a:extLst>
           </p:cNvPr>
@@ -15237,8 +15127,8 @@
         </p:blipFill>
         <p:spPr>
           <a:xfrm>
-            <a:off x="914399" y="3135738"/>
-            <a:ext cx="6457951" cy="3306931"/>
+            <a:off x="914399" y="2393340"/>
+            <a:ext cx="5877745" cy="2267266"/>
           </a:xfrm>
           <a:prstGeom prst="rect">
             <a:avLst/>
@@ -15248,7 +15138,7 @@
     </p:spTree>
     <p:extLst>
       <p:ext uri="{BB962C8B-B14F-4D97-AF65-F5344CB8AC3E}">
-        <p14:creationId xmlns:p14="http://schemas.microsoft.com/office/powerpoint/2010/main" val="865760638"/>
+        <p14:creationId xmlns:p14="http://schemas.microsoft.com/office/powerpoint/2010/main" val="3316709134"/>
       </p:ext>
     </p:extLst>
   </p:cSld>
@@ -15266,7 +15156,7 @@
         <p:cNvPr id="1" name="">
           <a:extLst>
             <a:ext uri="{FF2B5EF4-FFF2-40B4-BE49-F238E27FC236}">
-              <a16:creationId xmlns:a16="http://schemas.microsoft.com/office/drawing/2014/main" id="{3EB86378-DCF5-D0B3-3573-F75CB840221C}"/>
+              <a16:creationId xmlns:a16="http://schemas.microsoft.com/office/drawing/2014/main" id="{DCF66DA9-0669-0F41-F5D5-590960B2B0F5}"/>
             </a:ext>
           </a:extLst>
         </p:cNvPr>
@@ -15286,7 +15176,7 @@
           <p:cNvPr id="60" name="Title 59">
             <a:extLst>
               <a:ext uri="{FF2B5EF4-FFF2-40B4-BE49-F238E27FC236}">
-                <a16:creationId xmlns:a16="http://schemas.microsoft.com/office/drawing/2014/main" id="{3A65C8D5-10F0-4AA7-16FB-ABB5CAB91FCA}"/>
+                <a16:creationId xmlns:a16="http://schemas.microsoft.com/office/drawing/2014/main" id="{F177D652-10FE-968D-9B2F-CC2D5F0F3307}"/>
               </a:ext>
             </a:extLst>
           </p:cNvPr>
@@ -15311,7 +15201,7 @@
           <a:p>
             <a:r>
               <a:rPr lang="en-US" dirty="0"/>
-              <a:t>Host key verification failed</a:t>
+              <a:t>Database simulation failed</a:t>
             </a:r>
           </a:p>
         </p:txBody>
@@ -15321,7 +15211,7 @@
           <p:cNvPr id="43" name="Text Placeholder 42">
             <a:extLst>
               <a:ext uri="{FF2B5EF4-FFF2-40B4-BE49-F238E27FC236}">
-                <a16:creationId xmlns:a16="http://schemas.microsoft.com/office/drawing/2014/main" id="{2C3D1BF0-D6C8-91EF-CA1F-B841F2248083}"/>
+                <a16:creationId xmlns:a16="http://schemas.microsoft.com/office/drawing/2014/main" id="{C173444E-2C05-57E3-B68B-F8DE6EAB3F17}"/>
               </a:ext>
             </a:extLst>
           </p:cNvPr>
@@ -15344,7 +15234,7 @@
           <a:p>
             <a:r>
               <a:rPr lang="en-US" dirty="0"/>
-              <a:t>Database connection through bastion refused due to warning "Remote host identification has changed!"</a:t>
+              <a:t>Database instance is not running simulated responses</a:t>
             </a:r>
           </a:p>
         </p:txBody>
@@ -15354,7 +15244,7 @@
           <p:cNvPr id="44" name="Text Placeholder 43">
             <a:extLst>
               <a:ext uri="{FF2B5EF4-FFF2-40B4-BE49-F238E27FC236}">
-                <a16:creationId xmlns:a16="http://schemas.microsoft.com/office/drawing/2014/main" id="{2AF78A4B-325C-B4DE-8BF1-512F709C0F35}"/>
+                <a16:creationId xmlns:a16="http://schemas.microsoft.com/office/drawing/2014/main" id="{79489463-80EB-E480-4A78-8F1905CF0B73}"/>
               </a:ext>
             </a:extLst>
           </p:cNvPr>
@@ -15367,13 +15257,13 @@
         </p:nvSpPr>
         <p:spPr>
           <a:xfrm>
-            <a:off x="914399" y="4939393"/>
-            <a:ext cx="8360229" cy="1510393"/>
+            <a:off x="914399" y="2310493"/>
+            <a:ext cx="7494815" cy="2065565"/>
           </a:xfrm>
         </p:spPr>
         <p:txBody>
           <a:bodyPr>
-            <a:normAutofit/>
+            <a:normAutofit fontScale="85000" lnSpcReduction="10000"/>
           </a:bodyPr>
           <a:lstStyle/>
           <a:p>
@@ -15383,31 +15273,70 @@
             </a:r>
           </a:p>
           <a:p>
+            <a:pPr marL="285750" indent="-285750">
+              <a:buFont typeface="Arial" panose="020B0604020202020204" pitchFamily="34" charset="0"/>
+              <a:buChar char="•"/>
+            </a:pPr>
             <a:r>
-              <a:rPr lang="en-US" dirty="0"/>
-              <a:t>Run </a:t>
-            </a:r>
-            <a:r>
-              <a:rPr lang="en-US" sz="1200" dirty="0">
-                <a:latin typeface="Calibri Light" panose="020F0302020204030204" pitchFamily="34" charset="0"/>
-                <a:ea typeface="Calibri Light" panose="020F0302020204030204" pitchFamily="34" charset="0"/>
-                <a:cs typeface="Calibri Light" panose="020F0302020204030204" pitchFamily="34" charset="0"/>
-              </a:rPr>
-              <a:t>ssh-keygen -R DB-PRIVATE-IP  </a:t>
+              <a:rPr lang="en-US" dirty="0" err="1"/>
+              <a:t>NCat</a:t>
             </a:r>
             <a:r>
               <a:rPr lang="en-US" dirty="0"/>
-              <a:t>to remove any key that the </a:t>
+              <a:t> was not installed properly when running the script in the instance creation.</a:t>
+            </a:r>
+          </a:p>
+          <a:p>
+            <a:pPr marL="285750" indent="-285750">
+              <a:buFont typeface="Arial" panose="020B0604020202020204" pitchFamily="34" charset="0"/>
+              <a:buChar char="•"/>
+            </a:pPr>
+            <a:r>
+              <a:rPr lang="en-US" dirty="0"/>
+              <a:t>If the instance is already created, run bash </a:t>
             </a:r>
             <a:r>
               <a:rPr lang="en-US" dirty="0" err="1"/>
-              <a:t>db</a:t>
+              <a:t>sudo</a:t>
             </a:r>
             <a:r>
               <a:rPr lang="en-US" dirty="0"/>
-              <a:t> IP address may have attached.</a:t>
+              <a:t> </a:t>
             </a:r>
-            <a:endParaRPr lang="en-US" sz="3200" b="1" dirty="0"/>
+            <a:r>
+              <a:rPr lang="en-US" dirty="0" err="1"/>
+              <a:t>dnf</a:t>
+            </a:r>
+            <a:r>
+              <a:rPr lang="en-US" dirty="0"/>
+              <a:t> install </a:t>
+            </a:r>
+            <a:r>
+              <a:rPr lang="en-US" dirty="0" err="1"/>
+              <a:t>nmap-ncat</a:t>
+            </a:r>
+            <a:r>
+              <a:rPr lang="en-US" dirty="0"/>
+              <a:t>  to install the dependency.</a:t>
+            </a:r>
+          </a:p>
+          <a:p>
+            <a:pPr marL="285750" indent="-285750">
+              <a:buFont typeface="Arial" panose="020B0604020202020204" pitchFamily="34" charset="0"/>
+              <a:buChar char="•"/>
+            </a:pPr>
+            <a:r>
+              <a:rPr lang="en-US" dirty="0"/>
+              <a:t>To solve the issue permanently (create a healthy database instance), modify the </a:t>
+            </a:r>
+            <a:r>
+              <a:rPr lang="en-US" dirty="0" err="1"/>
+              <a:t>userdata</a:t>
+            </a:r>
+            <a:r>
+              <a:rPr lang="en-US" dirty="0"/>
+              <a:t> script as follows:</a:t>
+            </a:r>
           </a:p>
         </p:txBody>
       </p:sp>
@@ -15416,7 +15345,7 @@
           <p:cNvPr id="11" name="Slide Number Placeholder 13">
             <a:extLst>
               <a:ext uri="{FF2B5EF4-FFF2-40B4-BE49-F238E27FC236}">
-                <a16:creationId xmlns:a16="http://schemas.microsoft.com/office/drawing/2014/main" id="{5D0B3CCF-4FC9-C757-CD82-CDFFD44AC6D2}"/>
+                <a16:creationId xmlns:a16="http://schemas.microsoft.com/office/drawing/2014/main" id="{90131824-77DA-7E0C-9059-7F19DA795335}"/>
               </a:ext>
             </a:extLst>
           </p:cNvPr>
@@ -15599,7 +15528,7 @@
           <p:cNvPr id="2" name="Slide Number Placeholder 1">
             <a:extLst>
               <a:ext uri="{FF2B5EF4-FFF2-40B4-BE49-F238E27FC236}">
-                <a16:creationId xmlns:a16="http://schemas.microsoft.com/office/drawing/2014/main" id="{CB562DED-B4F1-14AE-58D0-60F327E13763}"/>
+                <a16:creationId xmlns:a16="http://schemas.microsoft.com/office/drawing/2014/main" id="{B629BF18-D7B0-F622-7011-35C5EF8223E2}"/>
               </a:ext>
             </a:extLst>
           </p:cNvPr>
@@ -15626,10 +15555,10 @@
       </p:sp>
       <p:pic>
         <p:nvPicPr>
-          <p:cNvPr id="3" name="Picture 2" descr="ts-host-key-changed.png">
+          <p:cNvPr id="5" name="Picture 4">
             <a:extLst>
               <a:ext uri="{FF2B5EF4-FFF2-40B4-BE49-F238E27FC236}">
-                <a16:creationId xmlns:a16="http://schemas.microsoft.com/office/drawing/2014/main" id="{DAE477CC-5A51-DE5E-1E27-B5B8CAE72247}"/>
+                <a16:creationId xmlns:a16="http://schemas.microsoft.com/office/drawing/2014/main" id="{DE2E2851-89C7-3E2A-AC32-3BB60C52E97B}"/>
               </a:ext>
             </a:extLst>
           </p:cNvPr>
@@ -15646,8 +15575,8 @@
         </p:blipFill>
         <p:spPr>
           <a:xfrm>
-            <a:off x="914399" y="2393340"/>
-            <a:ext cx="5877745" cy="2267266"/>
+            <a:off x="914398" y="4425505"/>
+            <a:ext cx="4716277" cy="1991624"/>
           </a:xfrm>
           <a:prstGeom prst="rect">
             <a:avLst/>
@@ -15657,7 +15586,7 @@
     </p:spTree>
     <p:extLst>
       <p:ext uri="{BB962C8B-B14F-4D97-AF65-F5344CB8AC3E}">
-        <p14:creationId xmlns:p14="http://schemas.microsoft.com/office/powerpoint/2010/main" val="3316709134"/>
+        <p14:creationId xmlns:p14="http://schemas.microsoft.com/office/powerpoint/2010/main" val="2221813318"/>
       </p:ext>
     </p:extLst>
   </p:cSld>
@@ -15672,13 +15601,7 @@
   <p:cSld>
     <p:spTree>
       <p:nvGrpSpPr>
-        <p:cNvPr id="1" name="">
-          <a:extLst>
-            <a:ext uri="{FF2B5EF4-FFF2-40B4-BE49-F238E27FC236}">
-              <a16:creationId xmlns:a16="http://schemas.microsoft.com/office/drawing/2014/main" id="{DCF66DA9-0669-0F41-F5D5-590960B2B0F5}"/>
-            </a:ext>
-          </a:extLst>
-        </p:cNvPr>
+        <p:cNvPr id="1" name=""/>
         <p:cNvGrpSpPr/>
         <p:nvPr/>
       </p:nvGrpSpPr>
@@ -15692,10 +15615,10 @@
       </p:grpSpPr>
       <p:sp>
         <p:nvSpPr>
-          <p:cNvPr id="60" name="Title 59">
+          <p:cNvPr id="2" name="Title 1">
             <a:extLst>
               <a:ext uri="{FF2B5EF4-FFF2-40B4-BE49-F238E27FC236}">
-                <a16:creationId xmlns:a16="http://schemas.microsoft.com/office/drawing/2014/main" id="{F177D652-10FE-968D-9B2F-CC2D5F0F3307}"/>
+                <a16:creationId xmlns:a16="http://schemas.microsoft.com/office/drawing/2014/main" id="{5E5CEC29-2F05-D7E4-A266-08C74BE4F5F8}"/>
               </a:ext>
             </a:extLst>
           </p:cNvPr>
@@ -15708,29 +15631,85 @@
         </p:nvSpPr>
         <p:spPr>
           <a:xfrm>
-            <a:off x="914400" y="1060704"/>
-            <a:ext cx="7132320" cy="555825"/>
+            <a:off x="6710510" y="2016579"/>
+            <a:ext cx="4441188" cy="2775857"/>
           </a:xfrm>
         </p:spPr>
         <p:txBody>
-          <a:bodyPr>
-            <a:normAutofit fontScale="90000"/>
-          </a:bodyPr>
+          <a:bodyPr/>
           <a:lstStyle/>
           <a:p>
             <a:r>
               <a:rPr lang="en-US" dirty="0"/>
-              <a:t>Database simulation failed</a:t>
+              <a:t>Cost Analysis</a:t>
             </a:r>
           </a:p>
         </p:txBody>
       </p:sp>
+      <p:pic>
+        <p:nvPicPr>
+          <p:cNvPr id="5" name="Picture Placeholder 4" descr="A person looking at a person who is looking at a computer screen">
+            <a:extLst>
+              <a:ext uri="{FF2B5EF4-FFF2-40B4-BE49-F238E27FC236}">
+                <a16:creationId xmlns:a16="http://schemas.microsoft.com/office/drawing/2014/main" id="{867EED95-1785-2CFF-AB72-C7852C4B1E15}"/>
+              </a:ext>
+            </a:extLst>
+          </p:cNvPr>
+          <p:cNvPicPr>
+            <a:picLocks noGrp="1" noChangeAspect="1"/>
+          </p:cNvPicPr>
+          <p:nvPr>
+            <p:ph type="pic" sz="quarter" idx="48"/>
+          </p:nvPr>
+        </p:nvPicPr>
+        <p:blipFill>
+          <a:blip r:embed="rId2"/>
+          <a:srcRect t="11651" b="11651"/>
+          <a:stretch/>
+        </p:blipFill>
+        <p:spPr>
+          <a:xfrm>
+            <a:off x="914400" y="539496"/>
+            <a:ext cx="5025207" cy="5779008"/>
+          </a:xfrm>
+        </p:spPr>
+      </p:pic>
+    </p:spTree>
+    <p:extLst>
+      <p:ext uri="{BB962C8B-B14F-4D97-AF65-F5344CB8AC3E}">
+        <p14:creationId xmlns:p14="http://schemas.microsoft.com/office/powerpoint/2010/main" val="1148227982"/>
+      </p:ext>
+    </p:extLst>
+  </p:cSld>
+  <p:clrMapOvr>
+    <a:masterClrMapping/>
+  </p:clrMapOvr>
+</p:sld>
+</file>
+
+<file path=ppt/slides/slide14.xml><?xml version="1.0" encoding="utf-8"?>
+<p:sld xmlns:a="http://schemas.openxmlformats.org/drawingml/2006/main" xmlns:r="http://schemas.openxmlformats.org/officeDocument/2006/relationships" xmlns:p="http://schemas.openxmlformats.org/presentationml/2006/main">
+  <p:cSld>
+    <p:spTree>
+      <p:nvGrpSpPr>
+        <p:cNvPr id="1" name=""/>
+        <p:cNvGrpSpPr/>
+        <p:nvPr/>
+      </p:nvGrpSpPr>
+      <p:grpSpPr>
+        <a:xfrm>
+          <a:off x="0" y="0"/>
+          <a:ext cx="0" cy="0"/>
+          <a:chOff x="0" y="0"/>
+          <a:chExt cx="0" cy="0"/>
+        </a:xfrm>
+      </p:grpSpPr>
       <p:sp>
         <p:nvSpPr>
-          <p:cNvPr id="43" name="Text Placeholder 42">
+          <p:cNvPr id="2" name="Title 1">
             <a:extLst>
               <a:ext uri="{FF2B5EF4-FFF2-40B4-BE49-F238E27FC236}">
-                <a16:creationId xmlns:a16="http://schemas.microsoft.com/office/drawing/2014/main" id="{C173444E-2C05-57E3-B68B-F8DE6EAB3F17}"/>
+                <a16:creationId xmlns:a16="http://schemas.microsoft.com/office/drawing/2014/main" id="{D1FC59F6-9B22-C211-4B4C-A2FD4B914C46}"/>
               </a:ext>
             </a:extLst>
           </p:cNvPr>
@@ -15738,133 +15717,258 @@
             <a:spLocks noGrp="1"/>
           </p:cNvSpPr>
           <p:nvPr>
-            <p:ph idx="1"/>
+            <p:ph type="title"/>
           </p:nvPr>
         </p:nvSpPr>
         <p:spPr>
           <a:xfrm>
-            <a:off x="914399" y="1771650"/>
-            <a:ext cx="6817179" cy="710293"/>
+            <a:off x="914400" y="731520"/>
+            <a:ext cx="4392386" cy="2103120"/>
+          </a:xfrm>
+          <a:noFill/>
+        </p:spPr>
+        <p:txBody>
+          <a:bodyPr anchor="b" anchorCtr="0">
+            <a:noAutofit/>
+          </a:bodyPr>
+          <a:lstStyle/>
+          <a:p>
+            <a:r>
+              <a:rPr lang="en-US" dirty="0"/>
+              <a:t>Monthly Cost Breakdown</a:t>
+            </a:r>
+          </a:p>
+        </p:txBody>
+      </p:sp>
+      <p:sp>
+        <p:nvSpPr>
+          <p:cNvPr id="3" name="Slide Number Placeholder 2">
+            <a:extLst>
+              <a:ext uri="{FF2B5EF4-FFF2-40B4-BE49-F238E27FC236}">
+                <a16:creationId xmlns:a16="http://schemas.microsoft.com/office/drawing/2014/main" id="{C5231D8C-5C7D-BFD9-19A4-7628C1400A37}"/>
+              </a:ext>
+            </a:extLst>
+          </p:cNvPr>
+          <p:cNvSpPr>
+            <a:spLocks noGrp="1"/>
+          </p:cNvSpPr>
+          <p:nvPr>
+            <p:ph type="sldNum" sz="quarter" idx="12"/>
+          </p:nvPr>
+        </p:nvSpPr>
+        <p:spPr/>
+        <p:txBody>
+          <a:bodyPr/>
+          <a:lstStyle/>
+          <a:p>
+            <a:fld id="{CBD12358-51D2-46B3-9BDE-DF29528B9454}" type="slidenum">
+              <a:rPr lang="en-US" smtClean="0"/>
+              <a:t>14</a:t>
+            </a:fld>
+            <a:endParaRPr lang="en-US" dirty="0"/>
+          </a:p>
+        </p:txBody>
+      </p:sp>
+      <p:pic>
+        <p:nvPicPr>
+          <p:cNvPr id="7" name="Picture 6">
+            <a:extLst>
+              <a:ext uri="{FF2B5EF4-FFF2-40B4-BE49-F238E27FC236}">
+                <a16:creationId xmlns:a16="http://schemas.microsoft.com/office/drawing/2014/main" id="{CF749A9E-07B0-AEEA-7E62-F394FDDBA21F}"/>
+              </a:ext>
+            </a:extLst>
+          </p:cNvPr>
+          <p:cNvPicPr>
+            <a:picLocks noChangeAspect="1"/>
+          </p:cNvPicPr>
+          <p:nvPr/>
+        </p:nvPicPr>
+        <p:blipFill>
+          <a:blip r:embed="rId2"/>
+          <a:srcRect t="1328" r="1602"/>
+          <a:stretch>
+            <a:fillRect/>
+          </a:stretch>
+        </p:blipFill>
+        <p:spPr>
+          <a:xfrm>
+            <a:off x="5306786" y="1916559"/>
+            <a:ext cx="5359593" cy="4301361"/>
+          </a:xfrm>
+          <a:prstGeom prst="rect">
+            <a:avLst/>
+          </a:prstGeom>
+        </p:spPr>
+      </p:pic>
+    </p:spTree>
+    <p:extLst>
+      <p:ext uri="{BB962C8B-B14F-4D97-AF65-F5344CB8AC3E}">
+        <p14:creationId xmlns:p14="http://schemas.microsoft.com/office/powerpoint/2010/main" val="3604630649"/>
+      </p:ext>
+    </p:extLst>
+  </p:cSld>
+  <p:clrMapOvr>
+    <a:masterClrMapping/>
+  </p:clrMapOvr>
+</p:sld>
+</file>
+
+<file path=ppt/slides/slide15.xml><?xml version="1.0" encoding="utf-8"?>
+<p:sld xmlns:a="http://schemas.openxmlformats.org/drawingml/2006/main" xmlns:r="http://schemas.openxmlformats.org/officeDocument/2006/relationships" xmlns:p="http://schemas.openxmlformats.org/presentationml/2006/main">
+  <p:cSld>
+    <p:spTree>
+      <p:nvGrpSpPr>
+        <p:cNvPr id="1" name=""/>
+        <p:cNvGrpSpPr/>
+        <p:nvPr/>
+      </p:nvGrpSpPr>
+      <p:grpSpPr>
+        <a:xfrm>
+          <a:off x="0" y="0"/>
+          <a:ext cx="0" cy="0"/>
+          <a:chOff x="0" y="0"/>
+          <a:chExt cx="0" cy="0"/>
+        </a:xfrm>
+      </p:grpSpPr>
+      <p:sp>
+        <p:nvSpPr>
+          <p:cNvPr id="8" name="Title 7">
+            <a:extLst>
+              <a:ext uri="{FF2B5EF4-FFF2-40B4-BE49-F238E27FC236}">
+                <a16:creationId xmlns:a16="http://schemas.microsoft.com/office/drawing/2014/main" id="{721E73BA-53B9-C0C1-476A-00736A64AB79}"/>
+              </a:ext>
+            </a:extLst>
+          </p:cNvPr>
+          <p:cNvSpPr>
+            <a:spLocks noGrp="1"/>
+          </p:cNvSpPr>
+          <p:nvPr>
+            <p:ph type="title"/>
+          </p:nvPr>
+        </p:nvSpPr>
+        <p:spPr>
+          <a:xfrm>
+            <a:off x="3465576" y="1499616"/>
+            <a:ext cx="7955280" cy="1335024"/>
+          </a:xfrm>
+        </p:spPr>
+        <p:txBody>
+          <a:bodyPr anchor="b" anchorCtr="0"/>
+          <a:lstStyle/>
+          <a:p>
+            <a:r>
+              <a:rPr lang="en-US" dirty="0"/>
+              <a:t>Cost optimization strategies</a:t>
+            </a:r>
+          </a:p>
+        </p:txBody>
+      </p:sp>
+      <p:sp>
+        <p:nvSpPr>
+          <p:cNvPr id="14" name="Text Placeholder 13">
+            <a:extLst>
+              <a:ext uri="{FF2B5EF4-FFF2-40B4-BE49-F238E27FC236}">
+                <a16:creationId xmlns:a16="http://schemas.microsoft.com/office/drawing/2014/main" id="{C78180D0-1AB6-8416-0EB1-10648E1A6050}"/>
+              </a:ext>
+            </a:extLst>
+          </p:cNvPr>
+          <p:cNvSpPr>
+            <a:spLocks noGrp="1"/>
+          </p:cNvSpPr>
+          <p:nvPr>
+            <p:ph idx="14"/>
+          </p:nvPr>
+        </p:nvSpPr>
+        <p:spPr>
+          <a:xfrm>
+            <a:off x="3465575" y="3108960"/>
+            <a:ext cx="7833795" cy="3108960"/>
+          </a:xfrm>
+        </p:spPr>
+        <p:txBody>
+          <a:bodyPr>
+            <a:normAutofit fontScale="92500" lnSpcReduction="10000"/>
+          </a:bodyPr>
+          <a:lstStyle/>
+          <a:p>
+            <a:r>
+              <a:rPr lang="en-US" dirty="0"/>
+              <a:t>Enable auto-scaling to launch only sufficient instances to keep the system working.</a:t>
+            </a:r>
+          </a:p>
+          <a:p>
+            <a:r>
+              <a:rPr lang="en-US" dirty="0"/>
+              <a:t>Add VPC Endpoints for services such as RDS, Systems Manager, CloudWatch to reduce NAT Gateway usage.</a:t>
+            </a:r>
+          </a:p>
+          <a:p>
+            <a:r>
+              <a:rPr lang="en-US" dirty="0"/>
+              <a:t>Apply Saving Plans for stable EC2 workloads to reduce On-demand costs.</a:t>
+            </a:r>
+          </a:p>
+          <a:p>
+            <a:r>
+              <a:rPr lang="en-US" dirty="0"/>
+              <a:t>If acceptable for non-critical workloads, run a Single-AZ RDS instance instead of Multi-AZ (roughly halves the RDS compute cost)</a:t>
+            </a:r>
+          </a:p>
+          <a:p>
+            <a:r>
+              <a:rPr lang="en-US" dirty="0"/>
+              <a:t>Optimize logging retention</a:t>
+            </a:r>
+          </a:p>
+          <a:p>
+            <a:r>
+              <a:rPr lang="en-US" dirty="0"/>
+              <a:t>Revisit instance sizes after collecting 30–60 days of CloudWatch metrics</a:t>
+            </a:r>
+          </a:p>
+        </p:txBody>
+      </p:sp>
+      <p:sp>
+        <p:nvSpPr>
+          <p:cNvPr id="2" name="Slide Number Placeholder 1">
+            <a:extLst>
+              <a:ext uri="{FF2B5EF4-FFF2-40B4-BE49-F238E27FC236}">
+                <a16:creationId xmlns:a16="http://schemas.microsoft.com/office/drawing/2014/main" id="{B2E4D147-B48C-ADE3-3FEF-627D467699A2}"/>
+              </a:ext>
+            </a:extLst>
+          </p:cNvPr>
+          <p:cNvSpPr>
+            <a:spLocks noGrp="1"/>
+          </p:cNvSpPr>
+          <p:nvPr>
+            <p:ph type="sldNum" sz="quarter" idx="40"/>
+          </p:nvPr>
+        </p:nvSpPr>
+        <p:spPr>
+          <a:xfrm>
+            <a:off x="11194169" y="6217920"/>
+            <a:ext cx="458592" cy="365125"/>
           </a:xfrm>
         </p:spPr>
         <p:txBody>
           <a:bodyPr/>
           <a:lstStyle/>
           <a:p>
-            <a:r>
-              <a:rPr lang="en-US" dirty="0"/>
-              <a:t>Database instance is not running simulated responses</a:t>
-            </a:r>
+            <a:fld id="{47FEACEE-25B4-4A2D-B147-27296E36371D}" type="slidenum">
+              <a:rPr lang="en-US" altLang="zh-CN" noProof="0" smtClean="0"/>
+              <a:pPr/>
+              <a:t>15</a:t>
+            </a:fld>
+            <a:endParaRPr lang="en-US" altLang="zh-CN" noProof="0" dirty="0"/>
           </a:p>
         </p:txBody>
       </p:sp>
       <p:sp>
         <p:nvSpPr>
-          <p:cNvPr id="44" name="Text Placeholder 43">
+          <p:cNvPr id="15" name="Slide Number Placeholder 13">
             <a:extLst>
               <a:ext uri="{FF2B5EF4-FFF2-40B4-BE49-F238E27FC236}">
-                <a16:creationId xmlns:a16="http://schemas.microsoft.com/office/drawing/2014/main" id="{79489463-80EB-E480-4A78-8F1905CF0B73}"/>
-              </a:ext>
-            </a:extLst>
-          </p:cNvPr>
-          <p:cNvSpPr>
-            <a:spLocks noGrp="1"/>
-          </p:cNvSpPr>
-          <p:nvPr>
-            <p:ph idx="56"/>
-          </p:nvPr>
-        </p:nvSpPr>
-        <p:spPr>
-          <a:xfrm>
-            <a:off x="914399" y="2310493"/>
-            <a:ext cx="7494815" cy="2065565"/>
-          </a:xfrm>
-        </p:spPr>
-        <p:txBody>
-          <a:bodyPr>
-            <a:normAutofit fontScale="85000" lnSpcReduction="10000"/>
-          </a:bodyPr>
-          <a:lstStyle/>
-          <a:p>
-            <a:r>
-              <a:rPr lang="en-US" sz="3200" b="1" dirty="0"/>
-              <a:t>Solution</a:t>
-            </a:r>
-          </a:p>
-          <a:p>
-            <a:pPr marL="285750" indent="-285750">
-              <a:buFont typeface="Arial" panose="020B0604020202020204" pitchFamily="34" charset="0"/>
-              <a:buChar char="•"/>
-            </a:pPr>
-            <a:r>
-              <a:rPr lang="en-US" dirty="0" err="1"/>
-              <a:t>NCat</a:t>
-            </a:r>
-            <a:r>
-              <a:rPr lang="en-US" dirty="0"/>
-              <a:t> was not installed properly when running the script in the instance creation.</a:t>
-            </a:r>
-          </a:p>
-          <a:p>
-            <a:pPr marL="285750" indent="-285750">
-              <a:buFont typeface="Arial" panose="020B0604020202020204" pitchFamily="34" charset="0"/>
-              <a:buChar char="•"/>
-            </a:pPr>
-            <a:r>
-              <a:rPr lang="en-US" dirty="0"/>
-              <a:t>If the instance is already created, run bash </a:t>
-            </a:r>
-            <a:r>
-              <a:rPr lang="en-US" dirty="0" err="1"/>
-              <a:t>sudo</a:t>
-            </a:r>
-            <a:r>
-              <a:rPr lang="en-US" dirty="0"/>
-              <a:t> </a:t>
-            </a:r>
-            <a:r>
-              <a:rPr lang="en-US" dirty="0" err="1"/>
-              <a:t>dnf</a:t>
-            </a:r>
-            <a:r>
-              <a:rPr lang="en-US" dirty="0"/>
-              <a:t> install </a:t>
-            </a:r>
-            <a:r>
-              <a:rPr lang="en-US" dirty="0" err="1"/>
-              <a:t>nmap-ncat</a:t>
-            </a:r>
-            <a:r>
-              <a:rPr lang="en-US" dirty="0"/>
-              <a:t>  to install the dependency.</a:t>
-            </a:r>
-          </a:p>
-          <a:p>
-            <a:pPr marL="285750" indent="-285750">
-              <a:buFont typeface="Arial" panose="020B0604020202020204" pitchFamily="34" charset="0"/>
-              <a:buChar char="•"/>
-            </a:pPr>
-            <a:r>
-              <a:rPr lang="en-US" dirty="0"/>
-              <a:t>To solve the issue permanently (create a healthy database instance), modify the </a:t>
-            </a:r>
-            <a:r>
-              <a:rPr lang="en-US" dirty="0" err="1"/>
-              <a:t>userdata</a:t>
-            </a:r>
-            <a:r>
-              <a:rPr lang="en-US" dirty="0"/>
-              <a:t> script as follows:</a:t>
-            </a:r>
-          </a:p>
-        </p:txBody>
-      </p:sp>
-      <p:sp>
-        <p:nvSpPr>
-          <p:cNvPr id="11" name="Slide Number Placeholder 13">
-            <a:extLst>
-              <a:ext uri="{FF2B5EF4-FFF2-40B4-BE49-F238E27FC236}">
-                <a16:creationId xmlns:a16="http://schemas.microsoft.com/office/drawing/2014/main" id="{90131824-77DA-7E0C-9059-7F19DA795335}"/>
+                <a16:creationId xmlns:a16="http://schemas.microsoft.com/office/drawing/2014/main" id="{55AB7753-4245-72E4-BEDB-33038672BA35}"/>
               </a:ext>
             </a:extLst>
           </p:cNvPr>
@@ -16026,630 +16130,7 @@
                 <a:tabLst/>
                 <a:defRPr/>
               </a:pPr>
-              <a:t>13</a:t>
-            </a:fld>
-            <a:endParaRPr kumimoji="0" lang="en-US" altLang="zh-CN" sz="1200" u="none" strike="noStrike" kern="1200" cap="none" spc="0" normalizeH="0" baseline="0" dirty="0">
-              <a:ln>
-                <a:noFill/>
-              </a:ln>
-              <a:solidFill>
-                <a:schemeClr val="bg1"/>
-              </a:solidFill>
-              <a:effectLst/>
-              <a:uLnTx/>
-              <a:uFillTx/>
-            </a:endParaRPr>
-          </a:p>
-        </p:txBody>
-      </p:sp>
-      <p:sp>
-        <p:nvSpPr>
-          <p:cNvPr id="2" name="Slide Number Placeholder 1">
-            <a:extLst>
-              <a:ext uri="{FF2B5EF4-FFF2-40B4-BE49-F238E27FC236}">
-                <a16:creationId xmlns:a16="http://schemas.microsoft.com/office/drawing/2014/main" id="{B629BF18-D7B0-F622-7011-35C5EF8223E2}"/>
-              </a:ext>
-            </a:extLst>
-          </p:cNvPr>
-          <p:cNvSpPr>
-            <a:spLocks noGrp="1"/>
-          </p:cNvSpPr>
-          <p:nvPr>
-            <p:ph type="sldNum" sz="quarter" idx="55"/>
-          </p:nvPr>
-        </p:nvSpPr>
-        <p:spPr/>
-        <p:txBody>
-          <a:bodyPr/>
-          <a:lstStyle/>
-          <a:p>
-            <a:fld id="{47FEACEE-25B4-4A2D-B147-27296E36371D}" type="slidenum">
-              <a:rPr lang="en-US" altLang="zh-CN" noProof="0" smtClean="0"/>
-              <a:pPr/>
-              <a:t>13</a:t>
-            </a:fld>
-            <a:endParaRPr lang="en-US" altLang="zh-CN" noProof="0" dirty="0"/>
-          </a:p>
-        </p:txBody>
-      </p:sp>
-      <p:pic>
-        <p:nvPicPr>
-          <p:cNvPr id="5" name="Picture 4">
-            <a:extLst>
-              <a:ext uri="{FF2B5EF4-FFF2-40B4-BE49-F238E27FC236}">
-                <a16:creationId xmlns:a16="http://schemas.microsoft.com/office/drawing/2014/main" id="{DE2E2851-89C7-3E2A-AC32-3BB60C52E97B}"/>
-              </a:ext>
-            </a:extLst>
-          </p:cNvPr>
-          <p:cNvPicPr>
-            <a:picLocks noChangeAspect="1"/>
-          </p:cNvPicPr>
-          <p:nvPr/>
-        </p:nvPicPr>
-        <p:blipFill>
-          <a:blip r:embed="rId3"/>
-          <a:stretch>
-            <a:fillRect/>
-          </a:stretch>
-        </p:blipFill>
-        <p:spPr>
-          <a:xfrm>
-            <a:off x="914398" y="4425505"/>
-            <a:ext cx="4716277" cy="1991624"/>
-          </a:xfrm>
-          <a:prstGeom prst="rect">
-            <a:avLst/>
-          </a:prstGeom>
-        </p:spPr>
-      </p:pic>
-    </p:spTree>
-    <p:extLst>
-      <p:ext uri="{BB962C8B-B14F-4D97-AF65-F5344CB8AC3E}">
-        <p14:creationId xmlns:p14="http://schemas.microsoft.com/office/powerpoint/2010/main" val="2221813318"/>
-      </p:ext>
-    </p:extLst>
-  </p:cSld>
-  <p:clrMapOvr>
-    <a:masterClrMapping/>
-  </p:clrMapOvr>
-</p:sld>
-</file>
-
-<file path=ppt/slides/slide14.xml><?xml version="1.0" encoding="utf-8"?>
-<p:sld xmlns:a="http://schemas.openxmlformats.org/drawingml/2006/main" xmlns:r="http://schemas.openxmlformats.org/officeDocument/2006/relationships" xmlns:p="http://schemas.openxmlformats.org/presentationml/2006/main">
-  <p:cSld>
-    <p:spTree>
-      <p:nvGrpSpPr>
-        <p:cNvPr id="1" name=""/>
-        <p:cNvGrpSpPr/>
-        <p:nvPr/>
-      </p:nvGrpSpPr>
-      <p:grpSpPr>
-        <a:xfrm>
-          <a:off x="0" y="0"/>
-          <a:ext cx="0" cy="0"/>
-          <a:chOff x="0" y="0"/>
-          <a:chExt cx="0" cy="0"/>
-        </a:xfrm>
-      </p:grpSpPr>
-      <p:sp>
-        <p:nvSpPr>
-          <p:cNvPr id="2" name="Title 1">
-            <a:extLst>
-              <a:ext uri="{FF2B5EF4-FFF2-40B4-BE49-F238E27FC236}">
-                <a16:creationId xmlns:a16="http://schemas.microsoft.com/office/drawing/2014/main" id="{5E5CEC29-2F05-D7E4-A266-08C74BE4F5F8}"/>
-              </a:ext>
-            </a:extLst>
-          </p:cNvPr>
-          <p:cNvSpPr>
-            <a:spLocks noGrp="1"/>
-          </p:cNvSpPr>
-          <p:nvPr>
-            <p:ph type="title"/>
-          </p:nvPr>
-        </p:nvSpPr>
-        <p:spPr>
-          <a:xfrm>
-            <a:off x="6710510" y="2016579"/>
-            <a:ext cx="4441188" cy="2775857"/>
-          </a:xfrm>
-        </p:spPr>
-        <p:txBody>
-          <a:bodyPr/>
-          <a:lstStyle/>
-          <a:p>
-            <a:r>
-              <a:rPr lang="en-US" dirty="0"/>
-              <a:t>Cost Analysis</a:t>
-            </a:r>
-          </a:p>
-        </p:txBody>
-      </p:sp>
-      <p:pic>
-        <p:nvPicPr>
-          <p:cNvPr id="5" name="Picture Placeholder 4" descr="A person looking at a person who is looking at a computer screen">
-            <a:extLst>
-              <a:ext uri="{FF2B5EF4-FFF2-40B4-BE49-F238E27FC236}">
-                <a16:creationId xmlns:a16="http://schemas.microsoft.com/office/drawing/2014/main" id="{867EED95-1785-2CFF-AB72-C7852C4B1E15}"/>
-              </a:ext>
-            </a:extLst>
-          </p:cNvPr>
-          <p:cNvPicPr>
-            <a:picLocks noGrp="1" noChangeAspect="1"/>
-          </p:cNvPicPr>
-          <p:nvPr>
-            <p:ph type="pic" sz="quarter" idx="48"/>
-          </p:nvPr>
-        </p:nvPicPr>
-        <p:blipFill>
-          <a:blip r:embed="rId2"/>
-          <a:srcRect t="11651" b="11651"/>
-          <a:stretch/>
-        </p:blipFill>
-        <p:spPr>
-          <a:xfrm>
-            <a:off x="914400" y="539496"/>
-            <a:ext cx="5025207" cy="5779008"/>
-          </a:xfrm>
-        </p:spPr>
-      </p:pic>
-    </p:spTree>
-    <p:extLst>
-      <p:ext uri="{BB962C8B-B14F-4D97-AF65-F5344CB8AC3E}">
-        <p14:creationId xmlns:p14="http://schemas.microsoft.com/office/powerpoint/2010/main" val="1148227982"/>
-      </p:ext>
-    </p:extLst>
-  </p:cSld>
-  <p:clrMapOvr>
-    <a:masterClrMapping/>
-  </p:clrMapOvr>
-</p:sld>
-</file>
-
-<file path=ppt/slides/slide15.xml><?xml version="1.0" encoding="utf-8"?>
-<p:sld xmlns:a="http://schemas.openxmlformats.org/drawingml/2006/main" xmlns:r="http://schemas.openxmlformats.org/officeDocument/2006/relationships" xmlns:p="http://schemas.openxmlformats.org/presentationml/2006/main">
-  <p:cSld>
-    <p:spTree>
-      <p:nvGrpSpPr>
-        <p:cNvPr id="1" name=""/>
-        <p:cNvGrpSpPr/>
-        <p:nvPr/>
-      </p:nvGrpSpPr>
-      <p:grpSpPr>
-        <a:xfrm>
-          <a:off x="0" y="0"/>
-          <a:ext cx="0" cy="0"/>
-          <a:chOff x="0" y="0"/>
-          <a:chExt cx="0" cy="0"/>
-        </a:xfrm>
-      </p:grpSpPr>
-      <p:sp>
-        <p:nvSpPr>
-          <p:cNvPr id="2" name="Title 1">
-            <a:extLst>
-              <a:ext uri="{FF2B5EF4-FFF2-40B4-BE49-F238E27FC236}">
-                <a16:creationId xmlns:a16="http://schemas.microsoft.com/office/drawing/2014/main" id="{D1FC59F6-9B22-C211-4B4C-A2FD4B914C46}"/>
-              </a:ext>
-            </a:extLst>
-          </p:cNvPr>
-          <p:cNvSpPr>
-            <a:spLocks noGrp="1"/>
-          </p:cNvSpPr>
-          <p:nvPr>
-            <p:ph type="title"/>
-          </p:nvPr>
-        </p:nvSpPr>
-        <p:spPr>
-          <a:xfrm>
-            <a:off x="914400" y="731520"/>
-            <a:ext cx="4392386" cy="2103120"/>
-          </a:xfrm>
-          <a:noFill/>
-        </p:spPr>
-        <p:txBody>
-          <a:bodyPr anchor="b" anchorCtr="0">
-            <a:noAutofit/>
-          </a:bodyPr>
-          <a:lstStyle/>
-          <a:p>
-            <a:r>
-              <a:rPr lang="en-US" dirty="0"/>
-              <a:t>Monthly Cost Breakdown</a:t>
-            </a:r>
-          </a:p>
-        </p:txBody>
-      </p:sp>
-      <p:sp>
-        <p:nvSpPr>
-          <p:cNvPr id="3" name="Slide Number Placeholder 2">
-            <a:extLst>
-              <a:ext uri="{FF2B5EF4-FFF2-40B4-BE49-F238E27FC236}">
-                <a16:creationId xmlns:a16="http://schemas.microsoft.com/office/drawing/2014/main" id="{C5231D8C-5C7D-BFD9-19A4-7628C1400A37}"/>
-              </a:ext>
-            </a:extLst>
-          </p:cNvPr>
-          <p:cNvSpPr>
-            <a:spLocks noGrp="1"/>
-          </p:cNvSpPr>
-          <p:nvPr>
-            <p:ph type="sldNum" sz="quarter" idx="12"/>
-          </p:nvPr>
-        </p:nvSpPr>
-        <p:spPr/>
-        <p:txBody>
-          <a:bodyPr/>
-          <a:lstStyle/>
-          <a:p>
-            <a:fld id="{CBD12358-51D2-46B3-9BDE-DF29528B9454}" type="slidenum">
-              <a:rPr lang="en-US" smtClean="0"/>
               <a:t>15</a:t>
-            </a:fld>
-            <a:endParaRPr lang="en-US" dirty="0"/>
-          </a:p>
-        </p:txBody>
-      </p:sp>
-      <p:pic>
-        <p:nvPicPr>
-          <p:cNvPr id="7" name="Picture 6">
-            <a:extLst>
-              <a:ext uri="{FF2B5EF4-FFF2-40B4-BE49-F238E27FC236}">
-                <a16:creationId xmlns:a16="http://schemas.microsoft.com/office/drawing/2014/main" id="{CF749A9E-07B0-AEEA-7E62-F394FDDBA21F}"/>
-              </a:ext>
-            </a:extLst>
-          </p:cNvPr>
-          <p:cNvPicPr>
-            <a:picLocks noChangeAspect="1"/>
-          </p:cNvPicPr>
-          <p:nvPr/>
-        </p:nvPicPr>
-        <p:blipFill>
-          <a:blip r:embed="rId2"/>
-          <a:srcRect t="1328" r="1602"/>
-          <a:stretch>
-            <a:fillRect/>
-          </a:stretch>
-        </p:blipFill>
-        <p:spPr>
-          <a:xfrm>
-            <a:off x="5306786" y="1916559"/>
-            <a:ext cx="5359593" cy="4301361"/>
-          </a:xfrm>
-          <a:prstGeom prst="rect">
-            <a:avLst/>
-          </a:prstGeom>
-        </p:spPr>
-      </p:pic>
-    </p:spTree>
-    <p:extLst>
-      <p:ext uri="{BB962C8B-B14F-4D97-AF65-F5344CB8AC3E}">
-        <p14:creationId xmlns:p14="http://schemas.microsoft.com/office/powerpoint/2010/main" val="3604630649"/>
-      </p:ext>
-    </p:extLst>
-  </p:cSld>
-  <p:clrMapOvr>
-    <a:masterClrMapping/>
-  </p:clrMapOvr>
-</p:sld>
-</file>
-
-<file path=ppt/slides/slide16.xml><?xml version="1.0" encoding="utf-8"?>
-<p:sld xmlns:a="http://schemas.openxmlformats.org/drawingml/2006/main" xmlns:r="http://schemas.openxmlformats.org/officeDocument/2006/relationships" xmlns:p="http://schemas.openxmlformats.org/presentationml/2006/main">
-  <p:cSld>
-    <p:spTree>
-      <p:nvGrpSpPr>
-        <p:cNvPr id="1" name=""/>
-        <p:cNvGrpSpPr/>
-        <p:nvPr/>
-      </p:nvGrpSpPr>
-      <p:grpSpPr>
-        <a:xfrm>
-          <a:off x="0" y="0"/>
-          <a:ext cx="0" cy="0"/>
-          <a:chOff x="0" y="0"/>
-          <a:chExt cx="0" cy="0"/>
-        </a:xfrm>
-      </p:grpSpPr>
-      <p:sp>
-        <p:nvSpPr>
-          <p:cNvPr id="8" name="Title 7">
-            <a:extLst>
-              <a:ext uri="{FF2B5EF4-FFF2-40B4-BE49-F238E27FC236}">
-                <a16:creationId xmlns:a16="http://schemas.microsoft.com/office/drawing/2014/main" id="{721E73BA-53B9-C0C1-476A-00736A64AB79}"/>
-              </a:ext>
-            </a:extLst>
-          </p:cNvPr>
-          <p:cNvSpPr>
-            <a:spLocks noGrp="1"/>
-          </p:cNvSpPr>
-          <p:nvPr>
-            <p:ph type="title"/>
-          </p:nvPr>
-        </p:nvSpPr>
-        <p:spPr>
-          <a:xfrm>
-            <a:off x="3465576" y="1499616"/>
-            <a:ext cx="7955280" cy="1335024"/>
-          </a:xfrm>
-        </p:spPr>
-        <p:txBody>
-          <a:bodyPr anchor="b" anchorCtr="0"/>
-          <a:lstStyle/>
-          <a:p>
-            <a:r>
-              <a:rPr lang="en-US" dirty="0"/>
-              <a:t>Cost optimization strategies</a:t>
-            </a:r>
-          </a:p>
-        </p:txBody>
-      </p:sp>
-      <p:sp>
-        <p:nvSpPr>
-          <p:cNvPr id="14" name="Text Placeholder 13">
-            <a:extLst>
-              <a:ext uri="{FF2B5EF4-FFF2-40B4-BE49-F238E27FC236}">
-                <a16:creationId xmlns:a16="http://schemas.microsoft.com/office/drawing/2014/main" id="{C78180D0-1AB6-8416-0EB1-10648E1A6050}"/>
-              </a:ext>
-            </a:extLst>
-          </p:cNvPr>
-          <p:cNvSpPr>
-            <a:spLocks noGrp="1"/>
-          </p:cNvSpPr>
-          <p:nvPr>
-            <p:ph idx="14"/>
-          </p:nvPr>
-        </p:nvSpPr>
-        <p:spPr>
-          <a:xfrm>
-            <a:off x="3465575" y="3108960"/>
-            <a:ext cx="7833795" cy="3108960"/>
-          </a:xfrm>
-        </p:spPr>
-        <p:txBody>
-          <a:bodyPr>
-            <a:normAutofit fontScale="92500" lnSpcReduction="10000"/>
-          </a:bodyPr>
-          <a:lstStyle/>
-          <a:p>
-            <a:r>
-              <a:rPr lang="en-US" dirty="0"/>
-              <a:t>Enable auto-scaling to launch only sufficient instances to keep the system working.</a:t>
-            </a:r>
-          </a:p>
-          <a:p>
-            <a:r>
-              <a:rPr lang="en-US" dirty="0"/>
-              <a:t>Add VPC Endpoints for services such as RDS, Systems Manager, CloudWatch to reduce NAT Gateway usage.</a:t>
-            </a:r>
-          </a:p>
-          <a:p>
-            <a:r>
-              <a:rPr lang="en-US" dirty="0"/>
-              <a:t>Apply Saving Plans for stable EC2 workloads to reduce On-demand costs.</a:t>
-            </a:r>
-          </a:p>
-          <a:p>
-            <a:r>
-              <a:rPr lang="en-US" dirty="0"/>
-              <a:t>If acceptable for non-critical workloads, run a Single-AZ RDS instance instead of Multi-AZ (roughly halves the RDS compute cost)</a:t>
-            </a:r>
-          </a:p>
-          <a:p>
-            <a:r>
-              <a:rPr lang="en-US" dirty="0"/>
-              <a:t>Optimize logging retention</a:t>
-            </a:r>
-          </a:p>
-          <a:p>
-            <a:r>
-              <a:rPr lang="en-US" dirty="0"/>
-              <a:t>Revisit instance sizes after collecting 30–60 days of CloudWatch metrics</a:t>
-            </a:r>
-          </a:p>
-        </p:txBody>
-      </p:sp>
-      <p:sp>
-        <p:nvSpPr>
-          <p:cNvPr id="2" name="Slide Number Placeholder 1">
-            <a:extLst>
-              <a:ext uri="{FF2B5EF4-FFF2-40B4-BE49-F238E27FC236}">
-                <a16:creationId xmlns:a16="http://schemas.microsoft.com/office/drawing/2014/main" id="{B2E4D147-B48C-ADE3-3FEF-627D467699A2}"/>
-              </a:ext>
-            </a:extLst>
-          </p:cNvPr>
-          <p:cNvSpPr>
-            <a:spLocks noGrp="1"/>
-          </p:cNvSpPr>
-          <p:nvPr>
-            <p:ph type="sldNum" sz="quarter" idx="40"/>
-          </p:nvPr>
-        </p:nvSpPr>
-        <p:spPr>
-          <a:xfrm>
-            <a:off x="11194169" y="6217920"/>
-            <a:ext cx="458592" cy="365125"/>
-          </a:xfrm>
-        </p:spPr>
-        <p:txBody>
-          <a:bodyPr/>
-          <a:lstStyle/>
-          <a:p>
-            <a:fld id="{47FEACEE-25B4-4A2D-B147-27296E36371D}" type="slidenum">
-              <a:rPr lang="en-US" altLang="zh-CN" noProof="0" smtClean="0"/>
-              <a:pPr/>
-              <a:t>16</a:t>
-            </a:fld>
-            <a:endParaRPr lang="en-US" altLang="zh-CN" noProof="0" dirty="0"/>
-          </a:p>
-        </p:txBody>
-      </p:sp>
-      <p:sp>
-        <p:nvSpPr>
-          <p:cNvPr id="15" name="Slide Number Placeholder 13">
-            <a:extLst>
-              <a:ext uri="{FF2B5EF4-FFF2-40B4-BE49-F238E27FC236}">
-                <a16:creationId xmlns:a16="http://schemas.microsoft.com/office/drawing/2014/main" id="{55AB7753-4245-72E4-BEDB-33038672BA35}"/>
-              </a:ext>
-            </a:extLst>
-          </p:cNvPr>
-          <p:cNvSpPr txBox="1">
-            <a:spLocks/>
-          </p:cNvSpPr>
-          <p:nvPr/>
-        </p:nvSpPr>
-        <p:spPr>
-          <a:xfrm>
-            <a:off x="11194169" y="6215665"/>
-            <a:ext cx="458592" cy="365125"/>
-          </a:xfrm>
-          <a:prstGeom prst="rect">
-            <a:avLst/>
-          </a:prstGeom>
-        </p:spPr>
-        <p:txBody>
-          <a:bodyPr anchor="ctr"/>
-          <a:lstStyle>
-            <a:defPPr>
-              <a:defRPr lang="zh-CN"/>
-            </a:defPPr>
-            <a:lvl1pPr marL="0" algn="ctr" defTabSz="914400" rtl="0" eaLnBrk="1" latinLnBrk="0" hangingPunct="1">
-              <a:defRPr sz="1200" b="0" i="0" kern="1200">
-                <a:solidFill>
-                  <a:schemeClr val="tx1"/>
-                </a:solidFill>
-                <a:latin typeface="Abadi" panose="020B0604020104020204" pitchFamily="34" charset="0"/>
-                <a:ea typeface="+mn-ea"/>
-                <a:cs typeface="+mn-cs"/>
-              </a:defRPr>
-            </a:lvl1pPr>
-            <a:lvl2pPr marL="457200" algn="l" defTabSz="914400" rtl="0" eaLnBrk="1" latinLnBrk="0" hangingPunct="1">
-              <a:defRPr sz="1800" kern="1200">
-                <a:solidFill>
-                  <a:schemeClr val="tx1"/>
-                </a:solidFill>
-                <a:latin typeface="+mn-lt"/>
-                <a:ea typeface="+mn-ea"/>
-                <a:cs typeface="+mn-cs"/>
-              </a:defRPr>
-            </a:lvl2pPr>
-            <a:lvl3pPr marL="914400" algn="l" defTabSz="914400" rtl="0" eaLnBrk="1" latinLnBrk="0" hangingPunct="1">
-              <a:defRPr sz="1800" kern="1200">
-                <a:solidFill>
-                  <a:schemeClr val="tx1"/>
-                </a:solidFill>
-                <a:latin typeface="+mn-lt"/>
-                <a:ea typeface="+mn-ea"/>
-                <a:cs typeface="+mn-cs"/>
-              </a:defRPr>
-            </a:lvl3pPr>
-            <a:lvl4pPr marL="1371600" algn="l" defTabSz="914400" rtl="0" eaLnBrk="1" latinLnBrk="0" hangingPunct="1">
-              <a:defRPr sz="1800" kern="1200">
-                <a:solidFill>
-                  <a:schemeClr val="tx1"/>
-                </a:solidFill>
-                <a:latin typeface="+mn-lt"/>
-                <a:ea typeface="+mn-ea"/>
-                <a:cs typeface="+mn-cs"/>
-              </a:defRPr>
-            </a:lvl4pPr>
-            <a:lvl5pPr marL="1828800" algn="l" defTabSz="914400" rtl="0" eaLnBrk="1" latinLnBrk="0" hangingPunct="1">
-              <a:defRPr sz="1800" kern="1200">
-                <a:solidFill>
-                  <a:schemeClr val="tx1"/>
-                </a:solidFill>
-                <a:latin typeface="+mn-lt"/>
-                <a:ea typeface="+mn-ea"/>
-                <a:cs typeface="+mn-cs"/>
-              </a:defRPr>
-            </a:lvl5pPr>
-            <a:lvl6pPr marL="2286000" algn="l" defTabSz="914400" rtl="0" eaLnBrk="1" latinLnBrk="0" hangingPunct="1">
-              <a:defRPr sz="1800" kern="1200">
-                <a:solidFill>
-                  <a:schemeClr val="tx1"/>
-                </a:solidFill>
-                <a:latin typeface="+mn-lt"/>
-                <a:ea typeface="+mn-ea"/>
-                <a:cs typeface="+mn-cs"/>
-              </a:defRPr>
-            </a:lvl6pPr>
-            <a:lvl7pPr marL="2743200" algn="l" defTabSz="914400" rtl="0" eaLnBrk="1" latinLnBrk="0" hangingPunct="1">
-              <a:defRPr sz="1800" kern="1200">
-                <a:solidFill>
-                  <a:schemeClr val="tx1"/>
-                </a:solidFill>
-                <a:latin typeface="+mn-lt"/>
-                <a:ea typeface="+mn-ea"/>
-                <a:cs typeface="+mn-cs"/>
-              </a:defRPr>
-            </a:lvl7pPr>
-            <a:lvl8pPr marL="3200400" algn="l" defTabSz="914400" rtl="0" eaLnBrk="1" latinLnBrk="0" hangingPunct="1">
-              <a:defRPr sz="1800" kern="1200">
-                <a:solidFill>
-                  <a:schemeClr val="tx1"/>
-                </a:solidFill>
-                <a:latin typeface="+mn-lt"/>
-                <a:ea typeface="+mn-ea"/>
-                <a:cs typeface="+mn-cs"/>
-              </a:defRPr>
-            </a:lvl8pPr>
-            <a:lvl9pPr marL="3657600" algn="l" defTabSz="914400" rtl="0" eaLnBrk="1" latinLnBrk="0" hangingPunct="1">
-              <a:defRPr sz="1800" kern="1200">
-                <a:solidFill>
-                  <a:schemeClr val="tx1"/>
-                </a:solidFill>
-                <a:latin typeface="+mn-lt"/>
-                <a:ea typeface="+mn-ea"/>
-                <a:cs typeface="+mn-cs"/>
-              </a:defRPr>
-            </a:lvl9pPr>
-          </a:lstStyle>
-          <a:p>
-            <a:pPr marL="0" marR="0" lvl="0" indent="0" algn="ctr" defTabSz="914400" rtl="0" eaLnBrk="1" fontAlgn="auto" latinLnBrk="0" hangingPunct="1">
-              <a:lnSpc>
-                <a:spcPct val="100000"/>
-              </a:lnSpc>
-              <a:spcBef>
-                <a:spcPts val="0"/>
-              </a:spcBef>
-              <a:spcAft>
-                <a:spcPts val="0"/>
-              </a:spcAft>
-              <a:buClrTx/>
-              <a:buSzTx/>
-              <a:buFontTx/>
-              <a:buNone/>
-              <a:tabLst/>
-              <a:defRPr/>
-            </a:pPr>
-            <a:fld id="{47FEACEE-25B4-4A2D-B147-27296E36371D}" type="slidenum">
-              <a:rPr kumimoji="0" lang="en-US" altLang="zh-CN" sz="1200" u="none" strike="noStrike" kern="1200" cap="none" spc="0" normalizeH="0" baseline="0" smtClean="0">
-                <a:ln>
-                  <a:noFill/>
-                </a:ln>
-                <a:solidFill>
-                  <a:schemeClr val="bg1"/>
-                </a:solidFill>
-                <a:effectLst/>
-                <a:uLnTx/>
-                <a:uFillTx/>
-              </a:rPr>
-              <a:pPr marL="0" marR="0" lvl="0" indent="0" algn="ctr" defTabSz="914400" rtl="0" eaLnBrk="1" fontAlgn="auto" latinLnBrk="0" hangingPunct="1">
-                <a:lnSpc>
-                  <a:spcPct val="100000"/>
-                </a:lnSpc>
-                <a:spcBef>
-                  <a:spcPts val="0"/>
-                </a:spcBef>
-                <a:spcAft>
-                  <a:spcPts val="0"/>
-                </a:spcAft>
-                <a:buClrTx/>
-                <a:buSzTx/>
-                <a:buFontTx/>
-                <a:buNone/>
-                <a:tabLst/>
-                <a:defRPr/>
-              </a:pPr>
-              <a:t>16</a:t>
             </a:fld>
             <a:endParaRPr kumimoji="0" lang="en-US" altLang="zh-CN" sz="1200" u="none" strike="noStrike" kern="1200" cap="none" spc="0" normalizeH="0" baseline="0" dirty="0">
               <a:ln>
@@ -16678,7 +16159,7 @@
 </p:sld>
 </file>
 
-<file path=ppt/slides/slide17.xml><?xml version="1.0" encoding="utf-8"?>
+<file path=ppt/slides/slide16.xml><?xml version="1.0" encoding="utf-8"?>
 <p:sld xmlns:a="http://schemas.openxmlformats.org/drawingml/2006/main" xmlns:r="http://schemas.openxmlformats.org/officeDocument/2006/relationships" xmlns:p="http://schemas.openxmlformats.org/presentationml/2006/main">
   <p:cSld>
     <p:spTree>
@@ -16957,7 +16438,7 @@
 </p:sld>
 </file>
 
-<file path=ppt/slides/slide18.xml><?xml version="1.0" encoding="utf-8"?>
+<file path=ppt/slides/slide17.xml><?xml version="1.0" encoding="utf-8"?>
 <p:sld xmlns:a="http://schemas.openxmlformats.org/drawingml/2006/main" xmlns:r="http://schemas.openxmlformats.org/officeDocument/2006/relationships" xmlns:p="http://schemas.openxmlformats.org/presentationml/2006/main">
   <p:cSld>
     <p:spTree>
@@ -17120,7 +16601,7 @@
             <a:fld id="{47FEACEE-25B4-4A2D-B147-27296E36371D}" type="slidenum">
               <a:rPr lang="en-US" altLang="zh-CN" noProof="0" smtClean="0"/>
               <a:pPr/>
-              <a:t>18</a:t>
+              <a:t>17</a:t>
             </a:fld>
             <a:endParaRPr lang="en-US" altLang="zh-CN" noProof="0" dirty="0"/>
           </a:p>
@@ -17293,7 +16774,7 @@
                 <a:tabLst/>
                 <a:defRPr/>
               </a:pPr>
-              <a:t>18</a:t>
+              <a:t>17</a:t>
             </a:fld>
             <a:endParaRPr kumimoji="0" lang="en-US" altLang="zh-CN" sz="1200" u="none" strike="noStrike" kern="1200" cap="none" spc="0" normalizeH="0" baseline="0" dirty="0">
               <a:ln>
@@ -17566,7 +17047,7 @@
 </p:sld>
 </file>
 
-<file path=ppt/slides/slide19.xml><?xml version="1.0" encoding="utf-8"?>
+<file path=ppt/slides/slide18.xml><?xml version="1.0" encoding="utf-8"?>
 <p:sld xmlns:a="http://schemas.openxmlformats.org/drawingml/2006/main" xmlns:r="http://schemas.openxmlformats.org/officeDocument/2006/relationships" xmlns:p="http://schemas.openxmlformats.org/presentationml/2006/main">
   <p:cSld>
     <p:spTree>
@@ -17845,159 +17326,7 @@
 </p:sld>
 </file>
 
-<file path=ppt/slides/slide2.xml><?xml version="1.0" encoding="utf-8"?>
-<p:sld xmlns:a="http://schemas.openxmlformats.org/drawingml/2006/main" xmlns:r="http://schemas.openxmlformats.org/officeDocument/2006/relationships" xmlns:p="http://schemas.openxmlformats.org/presentationml/2006/main">
-  <p:cSld>
-    <p:spTree>
-      <p:nvGrpSpPr>
-        <p:cNvPr id="1" name=""/>
-        <p:cNvGrpSpPr/>
-        <p:nvPr/>
-      </p:nvGrpSpPr>
-      <p:grpSpPr>
-        <a:xfrm>
-          <a:off x="0" y="0"/>
-          <a:ext cx="0" cy="0"/>
-          <a:chOff x="0" y="0"/>
-          <a:chExt cx="0" cy="0"/>
-        </a:xfrm>
-      </p:grpSpPr>
-      <p:sp>
-        <p:nvSpPr>
-          <p:cNvPr id="2" name="Title 1">
-            <a:extLst>
-              <a:ext uri="{FF2B5EF4-FFF2-40B4-BE49-F238E27FC236}">
-                <a16:creationId xmlns:a16="http://schemas.microsoft.com/office/drawing/2014/main" id="{725F021C-3CEB-0FBA-DA89-C9C82E741BB3}"/>
-              </a:ext>
-            </a:extLst>
-          </p:cNvPr>
-          <p:cNvSpPr>
-            <a:spLocks noGrp="1"/>
-          </p:cNvSpPr>
-          <p:nvPr>
-            <p:ph type="title"/>
-          </p:nvPr>
-        </p:nvSpPr>
-        <p:spPr>
-          <a:xfrm>
-            <a:off x="914400" y="3429000"/>
-            <a:ext cx="4206240" cy="2377440"/>
-          </a:xfrm>
-        </p:spPr>
-        <p:txBody>
-          <a:bodyPr anchor="t" anchorCtr="0"/>
-          <a:lstStyle/>
-          <a:p>
-            <a:r>
-              <a:rPr lang="en-US" dirty="0"/>
-              <a:t>Agenda </a:t>
-            </a:r>
-          </a:p>
-        </p:txBody>
-      </p:sp>
-      <p:sp>
-        <p:nvSpPr>
-          <p:cNvPr id="3" name="Text Placeholder 2">
-            <a:extLst>
-              <a:ext uri="{FF2B5EF4-FFF2-40B4-BE49-F238E27FC236}">
-                <a16:creationId xmlns:a16="http://schemas.microsoft.com/office/drawing/2014/main" id="{3C6746B3-AFD9-641E-7CBF-9A783646B368}"/>
-              </a:ext>
-            </a:extLst>
-          </p:cNvPr>
-          <p:cNvSpPr>
-            <a:spLocks noGrp="1"/>
-          </p:cNvSpPr>
-          <p:nvPr>
-            <p:ph sz="quarter" idx="35"/>
-          </p:nvPr>
-        </p:nvSpPr>
-        <p:spPr>
-          <a:xfrm>
-            <a:off x="5014127" y="3429000"/>
-            <a:ext cx="3855236" cy="2378075"/>
-          </a:xfrm>
-        </p:spPr>
-        <p:txBody>
-          <a:bodyPr anchor="t" anchorCtr="0">
-            <a:normAutofit/>
-          </a:bodyPr>
-          <a:lstStyle/>
-          <a:p>
-            <a:r>
-              <a:rPr lang="en-US" dirty="0"/>
-              <a:t>Architecture Overview</a:t>
-            </a:r>
-          </a:p>
-          <a:p>
-            <a:r>
-              <a:rPr lang="en-US" dirty="0"/>
-              <a:t>Challenges &amp; Solutions</a:t>
-            </a:r>
-          </a:p>
-          <a:p>
-            <a:r>
-              <a:rPr lang="en-US" dirty="0"/>
-              <a:t>Cost Analysis</a:t>
-            </a:r>
-          </a:p>
-          <a:p>
-            <a:r>
-              <a:rPr lang="en-US" dirty="0"/>
-              <a:t>Improvements &amp; Next Steps</a:t>
-            </a:r>
-          </a:p>
-          <a:p>
-            <a:r>
-              <a:rPr lang="en-US" dirty="0"/>
-              <a:t>Live Demo</a:t>
-            </a:r>
-          </a:p>
-        </p:txBody>
-      </p:sp>
-      <p:sp>
-        <p:nvSpPr>
-          <p:cNvPr id="4" name="Slide Number Placeholder 3">
-            <a:extLst>
-              <a:ext uri="{FF2B5EF4-FFF2-40B4-BE49-F238E27FC236}">
-                <a16:creationId xmlns:a16="http://schemas.microsoft.com/office/drawing/2014/main" id="{5D559569-83D5-A20B-653C-B9D6C8D98164}"/>
-              </a:ext>
-            </a:extLst>
-          </p:cNvPr>
-          <p:cNvSpPr>
-            <a:spLocks noGrp="1"/>
-          </p:cNvSpPr>
-          <p:nvPr>
-            <p:ph type="sldNum" sz="quarter" idx="34"/>
-          </p:nvPr>
-        </p:nvSpPr>
-        <p:spPr/>
-        <p:txBody>
-          <a:bodyPr/>
-          <a:lstStyle/>
-          <a:p>
-            <a:fld id="{47FEACEE-25B4-4A2D-B147-27296E36371D}" type="slidenum">
-              <a:rPr lang="en-US" altLang="zh-CN" noProof="0" smtClean="0"/>
-              <a:pPr/>
-              <a:t>2</a:t>
-            </a:fld>
-            <a:endParaRPr lang="en-US" altLang="zh-CN" noProof="0" dirty="0"/>
-          </a:p>
-        </p:txBody>
-      </p:sp>
-    </p:spTree>
-    <p:extLst>
-      <p:ext uri="{BB962C8B-B14F-4D97-AF65-F5344CB8AC3E}">
-        <p14:creationId xmlns:p14="http://schemas.microsoft.com/office/powerpoint/2010/main" val="1485080791"/>
-      </p:ext>
-    </p:extLst>
-  </p:cSld>
-  <p:clrMapOvr>
-    <a:masterClrMapping/>
-  </p:clrMapOvr>
-</p:sld>
-</file>
-
-<file path=ppt/slides/slide20.xml><?xml version="1.0" encoding="utf-8"?>
+<file path=ppt/slides/slide19.xml><?xml version="1.0" encoding="utf-8"?>
 <p:sld xmlns:a="http://schemas.openxmlformats.org/drawingml/2006/main" xmlns:r="http://schemas.openxmlformats.org/officeDocument/2006/relationships" xmlns:p="http://schemas.openxmlformats.org/presentationml/2006/main">
   <p:cSld>
     <p:spTree>
@@ -18066,7 +17395,159 @@
 </p:sld>
 </file>
 
-<file path=ppt/slides/slide21.xml><?xml version="1.0" encoding="utf-8"?>
+<file path=ppt/slides/slide2.xml><?xml version="1.0" encoding="utf-8"?>
+<p:sld xmlns:a="http://schemas.openxmlformats.org/drawingml/2006/main" xmlns:r="http://schemas.openxmlformats.org/officeDocument/2006/relationships" xmlns:p="http://schemas.openxmlformats.org/presentationml/2006/main">
+  <p:cSld>
+    <p:spTree>
+      <p:nvGrpSpPr>
+        <p:cNvPr id="1" name=""/>
+        <p:cNvGrpSpPr/>
+        <p:nvPr/>
+      </p:nvGrpSpPr>
+      <p:grpSpPr>
+        <a:xfrm>
+          <a:off x="0" y="0"/>
+          <a:ext cx="0" cy="0"/>
+          <a:chOff x="0" y="0"/>
+          <a:chExt cx="0" cy="0"/>
+        </a:xfrm>
+      </p:grpSpPr>
+      <p:sp>
+        <p:nvSpPr>
+          <p:cNvPr id="2" name="Title 1">
+            <a:extLst>
+              <a:ext uri="{FF2B5EF4-FFF2-40B4-BE49-F238E27FC236}">
+                <a16:creationId xmlns:a16="http://schemas.microsoft.com/office/drawing/2014/main" id="{725F021C-3CEB-0FBA-DA89-C9C82E741BB3}"/>
+              </a:ext>
+            </a:extLst>
+          </p:cNvPr>
+          <p:cNvSpPr>
+            <a:spLocks noGrp="1"/>
+          </p:cNvSpPr>
+          <p:nvPr>
+            <p:ph type="title"/>
+          </p:nvPr>
+        </p:nvSpPr>
+        <p:spPr>
+          <a:xfrm>
+            <a:off x="914400" y="3429000"/>
+            <a:ext cx="4206240" cy="2377440"/>
+          </a:xfrm>
+        </p:spPr>
+        <p:txBody>
+          <a:bodyPr anchor="t" anchorCtr="0"/>
+          <a:lstStyle/>
+          <a:p>
+            <a:r>
+              <a:rPr lang="en-US" dirty="0"/>
+              <a:t>Agenda </a:t>
+            </a:r>
+          </a:p>
+        </p:txBody>
+      </p:sp>
+      <p:sp>
+        <p:nvSpPr>
+          <p:cNvPr id="3" name="Text Placeholder 2">
+            <a:extLst>
+              <a:ext uri="{FF2B5EF4-FFF2-40B4-BE49-F238E27FC236}">
+                <a16:creationId xmlns:a16="http://schemas.microsoft.com/office/drawing/2014/main" id="{3C6746B3-AFD9-641E-7CBF-9A783646B368}"/>
+              </a:ext>
+            </a:extLst>
+          </p:cNvPr>
+          <p:cNvSpPr>
+            <a:spLocks noGrp="1"/>
+          </p:cNvSpPr>
+          <p:nvPr>
+            <p:ph sz="quarter" idx="35"/>
+          </p:nvPr>
+        </p:nvSpPr>
+        <p:spPr>
+          <a:xfrm>
+            <a:off x="5014127" y="3429000"/>
+            <a:ext cx="3855236" cy="2378075"/>
+          </a:xfrm>
+        </p:spPr>
+        <p:txBody>
+          <a:bodyPr anchor="t" anchorCtr="0">
+            <a:normAutofit/>
+          </a:bodyPr>
+          <a:lstStyle/>
+          <a:p>
+            <a:r>
+              <a:rPr lang="en-US" dirty="0"/>
+              <a:t>Architecture Overview</a:t>
+            </a:r>
+          </a:p>
+          <a:p>
+            <a:r>
+              <a:rPr lang="en-US" dirty="0"/>
+              <a:t>Challenges &amp; Solutions</a:t>
+            </a:r>
+          </a:p>
+          <a:p>
+            <a:r>
+              <a:rPr lang="en-US" dirty="0"/>
+              <a:t>Cost Analysis</a:t>
+            </a:r>
+          </a:p>
+          <a:p>
+            <a:r>
+              <a:rPr lang="en-US" dirty="0"/>
+              <a:t>Improvements &amp; Next Steps</a:t>
+            </a:r>
+          </a:p>
+          <a:p>
+            <a:r>
+              <a:rPr lang="en-US" dirty="0"/>
+              <a:t>Live Demo</a:t>
+            </a:r>
+          </a:p>
+        </p:txBody>
+      </p:sp>
+      <p:sp>
+        <p:nvSpPr>
+          <p:cNvPr id="4" name="Slide Number Placeholder 3">
+            <a:extLst>
+              <a:ext uri="{FF2B5EF4-FFF2-40B4-BE49-F238E27FC236}">
+                <a16:creationId xmlns:a16="http://schemas.microsoft.com/office/drawing/2014/main" id="{5D559569-83D5-A20B-653C-B9D6C8D98164}"/>
+              </a:ext>
+            </a:extLst>
+          </p:cNvPr>
+          <p:cNvSpPr>
+            <a:spLocks noGrp="1"/>
+          </p:cNvSpPr>
+          <p:nvPr>
+            <p:ph type="sldNum" sz="quarter" idx="34"/>
+          </p:nvPr>
+        </p:nvSpPr>
+        <p:spPr/>
+        <p:txBody>
+          <a:bodyPr/>
+          <a:lstStyle/>
+          <a:p>
+            <a:fld id="{47FEACEE-25B4-4A2D-B147-27296E36371D}" type="slidenum">
+              <a:rPr lang="en-US" altLang="zh-CN" noProof="0" smtClean="0"/>
+              <a:pPr/>
+              <a:t>2</a:t>
+            </a:fld>
+            <a:endParaRPr lang="en-US" altLang="zh-CN" noProof="0" dirty="0"/>
+          </a:p>
+        </p:txBody>
+      </p:sp>
+    </p:spTree>
+    <p:extLst>
+      <p:ext uri="{BB962C8B-B14F-4D97-AF65-F5344CB8AC3E}">
+        <p14:creationId xmlns:p14="http://schemas.microsoft.com/office/powerpoint/2010/main" val="1485080791"/>
+      </p:ext>
+    </p:extLst>
+  </p:cSld>
+  <p:clrMapOvr>
+    <a:masterClrMapping/>
+  </p:clrMapOvr>
+</p:sld>
+</file>
+
+<file path=ppt/slides/slide20.xml><?xml version="1.0" encoding="utf-8"?>
 <p:sld xmlns:a="http://schemas.openxmlformats.org/drawingml/2006/main" xmlns:r="http://schemas.openxmlformats.org/officeDocument/2006/relationships" xmlns:p="http://schemas.openxmlformats.org/presentationml/2006/main">
   <p:cSld>
     <p:spTree>
@@ -19142,197 +18623,6 @@
         <p:cNvPr id="1" name="">
           <a:extLst>
             <a:ext uri="{FF2B5EF4-FFF2-40B4-BE49-F238E27FC236}">
-              <a16:creationId xmlns:a16="http://schemas.microsoft.com/office/drawing/2014/main" id="{82DDC3EE-1F4D-E57D-A611-CE8A82B6B905}"/>
-            </a:ext>
-          </a:extLst>
-        </p:cNvPr>
-        <p:cNvGrpSpPr/>
-        <p:nvPr/>
-      </p:nvGrpSpPr>
-      <p:grpSpPr>
-        <a:xfrm>
-          <a:off x="0" y="0"/>
-          <a:ext cx="0" cy="0"/>
-          <a:chOff x="0" y="0"/>
-          <a:chExt cx="0" cy="0"/>
-        </a:xfrm>
-      </p:grpSpPr>
-      <p:sp>
-        <p:nvSpPr>
-          <p:cNvPr id="2" name="Title 1">
-            <a:extLst>
-              <a:ext uri="{FF2B5EF4-FFF2-40B4-BE49-F238E27FC236}">
-                <a16:creationId xmlns:a16="http://schemas.microsoft.com/office/drawing/2014/main" id="{0E4E511E-46A9-D51B-9B4C-AE331986C193}"/>
-              </a:ext>
-            </a:extLst>
-          </p:cNvPr>
-          <p:cNvSpPr>
-            <a:spLocks noGrp="1"/>
-          </p:cNvSpPr>
-          <p:nvPr>
-            <p:ph type="title"/>
-          </p:nvPr>
-        </p:nvSpPr>
-        <p:spPr>
-          <a:xfrm>
-            <a:off x="914400" y="2073729"/>
-            <a:ext cx="4572000" cy="3796719"/>
-          </a:xfrm>
-          <a:noFill/>
-        </p:spPr>
-        <p:txBody>
-          <a:bodyPr anchor="t" anchorCtr="0">
-            <a:noAutofit/>
-          </a:bodyPr>
-          <a:lstStyle/>
-          <a:p>
-            <a:r>
-              <a:rPr lang="en-US" dirty="0"/>
-              <a:t>Security Groups</a:t>
-            </a:r>
-          </a:p>
-        </p:txBody>
-      </p:sp>
-      <p:sp>
-        <p:nvSpPr>
-          <p:cNvPr id="4" name="Slide Number Placeholder 3">
-            <a:extLst>
-              <a:ext uri="{FF2B5EF4-FFF2-40B4-BE49-F238E27FC236}">
-                <a16:creationId xmlns:a16="http://schemas.microsoft.com/office/drawing/2014/main" id="{E9A8F8E2-006E-3009-D593-5F46553ADEB6}"/>
-              </a:ext>
-            </a:extLst>
-          </p:cNvPr>
-          <p:cNvSpPr>
-            <a:spLocks noGrp="1"/>
-          </p:cNvSpPr>
-          <p:nvPr>
-            <p:ph type="sldNum" sz="quarter" idx="12"/>
-          </p:nvPr>
-        </p:nvSpPr>
-        <p:spPr/>
-        <p:txBody>
-          <a:bodyPr/>
-          <a:lstStyle/>
-          <a:p>
-            <a:fld id="{69E57DC2-970A-4B3E-BB1C-7A09969E49DF}" type="slidenum">
-              <a:rPr lang="en-US" smtClean="0"/>
-              <a:t>7</a:t>
-            </a:fld>
-            <a:endParaRPr lang="en-US" dirty="0"/>
-          </a:p>
-        </p:txBody>
-      </p:sp>
-      <p:pic>
-        <p:nvPicPr>
-          <p:cNvPr id="6" name="Picture 5">
-            <a:extLst>
-              <a:ext uri="{FF2B5EF4-FFF2-40B4-BE49-F238E27FC236}">
-                <a16:creationId xmlns:a16="http://schemas.microsoft.com/office/drawing/2014/main" id="{250ED033-F45A-F38F-0934-9F74D8F106F0}"/>
-              </a:ext>
-            </a:extLst>
-          </p:cNvPr>
-          <p:cNvPicPr>
-            <a:picLocks noChangeAspect="1"/>
-          </p:cNvPicPr>
-          <p:nvPr/>
-        </p:nvPicPr>
-        <p:blipFill>
-          <a:blip r:embed="rId2"/>
-          <a:stretch>
-            <a:fillRect/>
-          </a:stretch>
-        </p:blipFill>
-        <p:spPr>
-          <a:xfrm>
-            <a:off x="8177715" y="1406512"/>
-            <a:ext cx="3663393" cy="4247533"/>
-          </a:xfrm>
-          <a:prstGeom prst="rect">
-            <a:avLst/>
-          </a:prstGeom>
-        </p:spPr>
-      </p:pic>
-      <p:pic>
-        <p:nvPicPr>
-          <p:cNvPr id="11" name="Picture 10">
-            <a:extLst>
-              <a:ext uri="{FF2B5EF4-FFF2-40B4-BE49-F238E27FC236}">
-                <a16:creationId xmlns:a16="http://schemas.microsoft.com/office/drawing/2014/main" id="{EF41F6A2-5AC8-D2D9-4F21-A6C82A71C720}"/>
-              </a:ext>
-            </a:extLst>
-          </p:cNvPr>
-          <p:cNvPicPr>
-            <a:picLocks noChangeAspect="1"/>
-          </p:cNvPicPr>
-          <p:nvPr/>
-        </p:nvPicPr>
-        <p:blipFill>
-          <a:blip r:embed="rId3"/>
-          <a:stretch>
-            <a:fillRect/>
-          </a:stretch>
-        </p:blipFill>
-        <p:spPr>
-          <a:xfrm>
-            <a:off x="291402" y="2849068"/>
-            <a:ext cx="4868039" cy="1159863"/>
-          </a:xfrm>
-          <a:prstGeom prst="rect">
-            <a:avLst/>
-          </a:prstGeom>
-        </p:spPr>
-      </p:pic>
-      <p:pic>
-        <p:nvPicPr>
-          <p:cNvPr id="13" name="Picture 12">
-            <a:extLst>
-              <a:ext uri="{FF2B5EF4-FFF2-40B4-BE49-F238E27FC236}">
-                <a16:creationId xmlns:a16="http://schemas.microsoft.com/office/drawing/2014/main" id="{985C0C65-721F-D794-25F8-B85E801E3A75}"/>
-              </a:ext>
-            </a:extLst>
-          </p:cNvPr>
-          <p:cNvPicPr>
-            <a:picLocks noChangeAspect="1"/>
-          </p:cNvPicPr>
-          <p:nvPr/>
-        </p:nvPicPr>
-        <p:blipFill>
-          <a:blip r:embed="rId4"/>
-          <a:stretch>
-            <a:fillRect/>
-          </a:stretch>
-        </p:blipFill>
-        <p:spPr>
-          <a:xfrm>
-            <a:off x="291402" y="4111844"/>
-            <a:ext cx="4477375" cy="1600423"/>
-          </a:xfrm>
-          <a:prstGeom prst="rect">
-            <a:avLst/>
-          </a:prstGeom>
-        </p:spPr>
-      </p:pic>
-    </p:spTree>
-    <p:extLst>
-      <p:ext uri="{BB962C8B-B14F-4D97-AF65-F5344CB8AC3E}">
-        <p14:creationId xmlns:p14="http://schemas.microsoft.com/office/powerpoint/2010/main" val="253669428"/>
-      </p:ext>
-    </p:extLst>
-  </p:cSld>
-  <p:clrMapOvr>
-    <a:masterClrMapping/>
-  </p:clrMapOvr>
-</p:sld>
-</file>
-
-<file path=ppt/slides/slide8.xml><?xml version="1.0" encoding="utf-8"?>
-<p:sld xmlns:a="http://schemas.openxmlformats.org/drawingml/2006/main" xmlns:r="http://schemas.openxmlformats.org/officeDocument/2006/relationships" xmlns:p="http://schemas.openxmlformats.org/presentationml/2006/main">
-  <p:cSld>
-    <p:spTree>
-      <p:nvGrpSpPr>
-        <p:cNvPr id="1" name="">
-          <a:extLst>
-            <a:ext uri="{FF2B5EF4-FFF2-40B4-BE49-F238E27FC236}">
               <a16:creationId xmlns:a16="http://schemas.microsoft.com/office/drawing/2014/main" id="{684782CA-FA12-1472-7AAF-35E217470D7B}"/>
             </a:ext>
           </a:extLst>
@@ -19494,7 +18784,7 @@
           <a:p>
             <a:fld id="{69E57DC2-970A-4B3E-BB1C-7A09969E49DF}" type="slidenum">
               <a:rPr lang="en-US" smtClean="0"/>
-              <a:t>8</a:t>
+              <a:t>7</a:t>
             </a:fld>
             <a:endParaRPr lang="en-US" dirty="0"/>
           </a:p>
@@ -19543,7 +18833,7 @@
 </p:sld>
 </file>
 
-<file path=ppt/slides/slide9.xml><?xml version="1.0" encoding="utf-8"?>
+<file path=ppt/slides/slide8.xml><?xml version="1.0" encoding="utf-8"?>
 <p:sld xmlns:a="http://schemas.openxmlformats.org/drawingml/2006/main" xmlns:r="http://schemas.openxmlformats.org/officeDocument/2006/relationships" xmlns:p="http://schemas.openxmlformats.org/presentationml/2006/main">
   <p:cSld>
     <p:spTree>
@@ -19807,6 +19097,524 @@
     <p:extLst>
       <p:ext uri="{BB962C8B-B14F-4D97-AF65-F5344CB8AC3E}">
         <p14:creationId xmlns:p14="http://schemas.microsoft.com/office/powerpoint/2010/main" val="2735087570"/>
+      </p:ext>
+    </p:extLst>
+  </p:cSld>
+  <p:clrMapOvr>
+    <a:masterClrMapping/>
+  </p:clrMapOvr>
+</p:sld>
+</file>
+
+<file path=ppt/slides/slide9.xml><?xml version="1.0" encoding="utf-8"?>
+<p:sld xmlns:a="http://schemas.openxmlformats.org/drawingml/2006/main" xmlns:r="http://schemas.openxmlformats.org/officeDocument/2006/relationships" xmlns:p="http://schemas.openxmlformats.org/presentationml/2006/main">
+  <p:cSld>
+    <p:spTree>
+      <p:nvGrpSpPr>
+        <p:cNvPr id="1" name=""/>
+        <p:cNvGrpSpPr/>
+        <p:nvPr/>
+      </p:nvGrpSpPr>
+      <p:grpSpPr>
+        <a:xfrm>
+          <a:off x="0" y="0"/>
+          <a:ext cx="0" cy="0"/>
+          <a:chOff x="0" y="0"/>
+          <a:chExt cx="0" cy="0"/>
+        </a:xfrm>
+      </p:grpSpPr>
+      <p:sp>
+        <p:nvSpPr>
+          <p:cNvPr id="60" name="Title 59">
+            <a:extLst>
+              <a:ext uri="{FF2B5EF4-FFF2-40B4-BE49-F238E27FC236}">
+                <a16:creationId xmlns:a16="http://schemas.microsoft.com/office/drawing/2014/main" id="{0031CE36-F77D-3964-C169-771DBA49D28A}"/>
+              </a:ext>
+            </a:extLst>
+          </p:cNvPr>
+          <p:cNvSpPr>
+            <a:spLocks noGrp="1"/>
+          </p:cNvSpPr>
+          <p:nvPr>
+            <p:ph type="title"/>
+          </p:nvPr>
+        </p:nvSpPr>
+        <p:spPr>
+          <a:xfrm>
+            <a:off x="914400" y="1060704"/>
+            <a:ext cx="7132320" cy="555825"/>
+          </a:xfrm>
+        </p:spPr>
+        <p:txBody>
+          <a:bodyPr>
+            <a:normAutofit fontScale="90000"/>
+          </a:bodyPr>
+          <a:lstStyle/>
+          <a:p>
+            <a:r>
+              <a:rPr lang="en-US" dirty="0"/>
+              <a:t>Application Instance stars unhealthy</a:t>
+            </a:r>
+          </a:p>
+        </p:txBody>
+      </p:sp>
+      <p:sp>
+        <p:nvSpPr>
+          <p:cNvPr id="43" name="Text Placeholder 42">
+            <a:extLst>
+              <a:ext uri="{FF2B5EF4-FFF2-40B4-BE49-F238E27FC236}">
+                <a16:creationId xmlns:a16="http://schemas.microsoft.com/office/drawing/2014/main" id="{520E98B6-7B33-8FD4-A662-31DD4B85E22E}"/>
+              </a:ext>
+            </a:extLst>
+          </p:cNvPr>
+          <p:cNvSpPr>
+            <a:spLocks noGrp="1"/>
+          </p:cNvSpPr>
+          <p:nvPr>
+            <p:ph idx="1"/>
+          </p:nvPr>
+        </p:nvSpPr>
+        <p:spPr>
+          <a:xfrm>
+            <a:off x="914399" y="1771650"/>
+            <a:ext cx="6817179" cy="710293"/>
+          </a:xfrm>
+        </p:spPr>
+        <p:txBody>
+          <a:bodyPr/>
+          <a:lstStyle/>
+          <a:p>
+            <a:r>
+              <a:rPr lang="en-US" dirty="0"/>
+              <a:t>Application server is marked as unhealthy at the first start.</a:t>
+            </a:r>
+          </a:p>
+        </p:txBody>
+      </p:sp>
+      <p:sp>
+        <p:nvSpPr>
+          <p:cNvPr id="44" name="Text Placeholder 43">
+            <a:extLst>
+              <a:ext uri="{FF2B5EF4-FFF2-40B4-BE49-F238E27FC236}">
+                <a16:creationId xmlns:a16="http://schemas.microsoft.com/office/drawing/2014/main" id="{78466807-A2DA-EC5D-ACDE-B83D6F7169EA}"/>
+              </a:ext>
+            </a:extLst>
+          </p:cNvPr>
+          <p:cNvSpPr>
+            <a:spLocks noGrp="1"/>
+          </p:cNvSpPr>
+          <p:nvPr>
+            <p:ph idx="56"/>
+          </p:nvPr>
+        </p:nvSpPr>
+        <p:spPr>
+          <a:xfrm>
+            <a:off x="1020535" y="4686300"/>
+            <a:ext cx="8254093" cy="1632857"/>
+          </a:xfrm>
+        </p:spPr>
+        <p:txBody>
+          <a:bodyPr>
+            <a:normAutofit/>
+          </a:bodyPr>
+          <a:lstStyle/>
+          <a:p>
+            <a:r>
+              <a:rPr lang="en-US" sz="3200" b="1" dirty="0"/>
+              <a:t>Solution</a:t>
+            </a:r>
+          </a:p>
+          <a:p>
+            <a:pPr>
+              <a:spcBef>
+                <a:spcPts val="600"/>
+              </a:spcBef>
+            </a:pPr>
+            <a:r>
+              <a:rPr lang="en-US" sz="1600" dirty="0"/>
+              <a:t>Run bash </a:t>
+            </a:r>
+            <a:r>
+              <a:rPr lang="en-US" sz="1200" dirty="0" err="1">
+                <a:latin typeface="Calibri Light" panose="020F0302020204030204" pitchFamily="34" charset="0"/>
+                <a:ea typeface="Calibri Light" panose="020F0302020204030204" pitchFamily="34" charset="0"/>
+                <a:cs typeface="Calibri Light" panose="020F0302020204030204" pitchFamily="34" charset="0"/>
+              </a:rPr>
+              <a:t>npm</a:t>
+            </a:r>
+            <a:r>
+              <a:rPr lang="en-US" sz="1200" dirty="0">
+                <a:latin typeface="Calibri Light" panose="020F0302020204030204" pitchFamily="34" charset="0"/>
+                <a:ea typeface="Calibri Light" panose="020F0302020204030204" pitchFamily="34" charset="0"/>
+                <a:cs typeface="Calibri Light" panose="020F0302020204030204" pitchFamily="34" charset="0"/>
+              </a:rPr>
+              <a:t> install </a:t>
+            </a:r>
+            <a:r>
+              <a:rPr lang="en-US" sz="1200" dirty="0" err="1">
+                <a:latin typeface="Calibri Light" panose="020F0302020204030204" pitchFamily="34" charset="0"/>
+                <a:ea typeface="Calibri Light" panose="020F0302020204030204" pitchFamily="34" charset="0"/>
+                <a:cs typeface="Calibri Light" panose="020F0302020204030204" pitchFamily="34" charset="0"/>
+              </a:rPr>
+              <a:t>pg</a:t>
+            </a:r>
+            <a:r>
+              <a:rPr lang="en-US" sz="1200" dirty="0">
+                <a:latin typeface="Calibri Light" panose="020F0302020204030204" pitchFamily="34" charset="0"/>
+                <a:ea typeface="Calibri Light" panose="020F0302020204030204" pitchFamily="34" charset="0"/>
+                <a:cs typeface="Calibri Light" panose="020F0302020204030204" pitchFamily="34" charset="0"/>
+              </a:rPr>
+              <a:t> </a:t>
+            </a:r>
+            <a:r>
+              <a:rPr lang="en-US" sz="1600" dirty="0"/>
+              <a:t>to install the dependency needed. </a:t>
+            </a:r>
+          </a:p>
+          <a:p>
+            <a:pPr>
+              <a:spcBef>
+                <a:spcPts val="600"/>
+              </a:spcBef>
+            </a:pPr>
+            <a:r>
+              <a:rPr lang="en-US" sz="1600" dirty="0"/>
+              <a:t>Run bash </a:t>
+            </a:r>
+            <a:r>
+              <a:rPr lang="en-US" sz="1200" dirty="0" err="1">
+                <a:latin typeface="Calibri Light" panose="020F0302020204030204" pitchFamily="34" charset="0"/>
+                <a:ea typeface="Calibri Light" panose="020F0302020204030204" pitchFamily="34" charset="0"/>
+                <a:cs typeface="Calibri Light" panose="020F0302020204030204" pitchFamily="34" charset="0"/>
+              </a:rPr>
+              <a:t>sudo</a:t>
+            </a:r>
+            <a:r>
+              <a:rPr lang="en-US" sz="1200" dirty="0">
+                <a:latin typeface="Calibri Light" panose="020F0302020204030204" pitchFamily="34" charset="0"/>
+                <a:ea typeface="Calibri Light" panose="020F0302020204030204" pitchFamily="34" charset="0"/>
+                <a:cs typeface="Calibri Light" panose="020F0302020204030204" pitchFamily="34" charset="0"/>
+              </a:rPr>
+              <a:t> </a:t>
+            </a:r>
+            <a:r>
+              <a:rPr lang="en-US" sz="1200" dirty="0" err="1">
+                <a:latin typeface="Calibri Light" panose="020F0302020204030204" pitchFamily="34" charset="0"/>
+                <a:ea typeface="Calibri Light" panose="020F0302020204030204" pitchFamily="34" charset="0"/>
+                <a:cs typeface="Calibri Light" panose="020F0302020204030204" pitchFamily="34" charset="0"/>
+              </a:rPr>
+              <a:t>chmod</a:t>
+            </a:r>
+            <a:r>
+              <a:rPr lang="en-US" sz="1200" dirty="0">
+                <a:latin typeface="Calibri Light" panose="020F0302020204030204" pitchFamily="34" charset="0"/>
+                <a:ea typeface="Calibri Light" panose="020F0302020204030204" pitchFamily="34" charset="0"/>
+                <a:cs typeface="Calibri Light" panose="020F0302020204030204" pitchFamily="34" charset="0"/>
+              </a:rPr>
+              <a:t> 777 app.log </a:t>
+            </a:r>
+            <a:r>
+              <a:rPr lang="en-US" sz="1600" dirty="0"/>
+              <a:t>to allow edition of app.log file. </a:t>
+            </a:r>
+          </a:p>
+          <a:p>
+            <a:pPr>
+              <a:spcBef>
+                <a:spcPts val="600"/>
+              </a:spcBef>
+            </a:pPr>
+            <a:r>
+              <a:rPr lang="en-US" sz="1600" dirty="0"/>
+              <a:t>Run the application using the command </a:t>
+            </a:r>
+            <a:r>
+              <a:rPr lang="en-US" sz="1200" dirty="0" err="1">
+                <a:latin typeface="Calibri Light" panose="020F0302020204030204" pitchFamily="34" charset="0"/>
+                <a:ea typeface="Calibri Light" panose="020F0302020204030204" pitchFamily="34" charset="0"/>
+                <a:cs typeface="Calibri Light" panose="020F0302020204030204" pitchFamily="34" charset="0"/>
+              </a:rPr>
+              <a:t>sudo</a:t>
+            </a:r>
+            <a:r>
+              <a:rPr lang="en-US" sz="1200" dirty="0">
+                <a:latin typeface="Calibri Light" panose="020F0302020204030204" pitchFamily="34" charset="0"/>
+                <a:ea typeface="Calibri Light" panose="020F0302020204030204" pitchFamily="34" charset="0"/>
+                <a:cs typeface="Calibri Light" panose="020F0302020204030204" pitchFamily="34" charset="0"/>
+              </a:rPr>
+              <a:t> </a:t>
+            </a:r>
+            <a:r>
+              <a:rPr lang="en-US" sz="1200" dirty="0" err="1">
+                <a:latin typeface="Calibri Light" panose="020F0302020204030204" pitchFamily="34" charset="0"/>
+                <a:ea typeface="Calibri Light" panose="020F0302020204030204" pitchFamily="34" charset="0"/>
+                <a:cs typeface="Calibri Light" panose="020F0302020204030204" pitchFamily="34" charset="0"/>
+              </a:rPr>
+              <a:t>nohup</a:t>
+            </a:r>
+            <a:r>
+              <a:rPr lang="en-US" sz="1200" dirty="0">
+                <a:latin typeface="Calibri Light" panose="020F0302020204030204" pitchFamily="34" charset="0"/>
+                <a:ea typeface="Calibri Light" panose="020F0302020204030204" pitchFamily="34" charset="0"/>
+                <a:cs typeface="Calibri Light" panose="020F0302020204030204" pitchFamily="34" charset="0"/>
+              </a:rPr>
+              <a:t> node server.js &gt; app.log 2&gt;&amp;1 &amp;.</a:t>
+            </a:r>
+            <a:endParaRPr lang="en-US" sz="1600" dirty="0">
+              <a:latin typeface="Calibri Light" panose="020F0302020204030204" pitchFamily="34" charset="0"/>
+              <a:ea typeface="Calibri Light" panose="020F0302020204030204" pitchFamily="34" charset="0"/>
+              <a:cs typeface="Calibri Light" panose="020F0302020204030204" pitchFamily="34" charset="0"/>
+            </a:endParaRPr>
+          </a:p>
+        </p:txBody>
+      </p:sp>
+      <p:sp>
+        <p:nvSpPr>
+          <p:cNvPr id="11" name="Slide Number Placeholder 13">
+            <a:extLst>
+              <a:ext uri="{FF2B5EF4-FFF2-40B4-BE49-F238E27FC236}">
+                <a16:creationId xmlns:a16="http://schemas.microsoft.com/office/drawing/2014/main" id="{930FF33C-2E3C-37EC-75C2-1BE4513D9B62}"/>
+              </a:ext>
+            </a:extLst>
+          </p:cNvPr>
+          <p:cNvSpPr txBox="1">
+            <a:spLocks/>
+          </p:cNvSpPr>
+          <p:nvPr/>
+        </p:nvSpPr>
+        <p:spPr>
+          <a:xfrm>
+            <a:off x="11194169" y="6215665"/>
+            <a:ext cx="458592" cy="365125"/>
+          </a:xfrm>
+          <a:prstGeom prst="rect">
+            <a:avLst/>
+          </a:prstGeom>
+        </p:spPr>
+        <p:txBody>
+          <a:bodyPr anchor="ctr"/>
+          <a:lstStyle>
+            <a:defPPr>
+              <a:defRPr lang="zh-CN"/>
+            </a:defPPr>
+            <a:lvl1pPr marL="0" algn="ctr" defTabSz="914400" rtl="0" eaLnBrk="1" latinLnBrk="0" hangingPunct="1">
+              <a:defRPr sz="1200" b="0" i="0" kern="1200">
+                <a:solidFill>
+                  <a:schemeClr val="tx1"/>
+                </a:solidFill>
+                <a:latin typeface="Abadi" panose="020B0604020104020204" pitchFamily="34" charset="0"/>
+                <a:ea typeface="+mn-ea"/>
+                <a:cs typeface="+mn-cs"/>
+              </a:defRPr>
+            </a:lvl1pPr>
+            <a:lvl2pPr marL="457200" algn="l" defTabSz="914400" rtl="0" eaLnBrk="1" latinLnBrk="0" hangingPunct="1">
+              <a:defRPr sz="1800" kern="1200">
+                <a:solidFill>
+                  <a:schemeClr val="tx1"/>
+                </a:solidFill>
+                <a:latin typeface="+mn-lt"/>
+                <a:ea typeface="+mn-ea"/>
+                <a:cs typeface="+mn-cs"/>
+              </a:defRPr>
+            </a:lvl2pPr>
+            <a:lvl3pPr marL="914400" algn="l" defTabSz="914400" rtl="0" eaLnBrk="1" latinLnBrk="0" hangingPunct="1">
+              <a:defRPr sz="1800" kern="1200">
+                <a:solidFill>
+                  <a:schemeClr val="tx1"/>
+                </a:solidFill>
+                <a:latin typeface="+mn-lt"/>
+                <a:ea typeface="+mn-ea"/>
+                <a:cs typeface="+mn-cs"/>
+              </a:defRPr>
+            </a:lvl3pPr>
+            <a:lvl4pPr marL="1371600" algn="l" defTabSz="914400" rtl="0" eaLnBrk="1" latinLnBrk="0" hangingPunct="1">
+              <a:defRPr sz="1800" kern="1200">
+                <a:solidFill>
+                  <a:schemeClr val="tx1"/>
+                </a:solidFill>
+                <a:latin typeface="+mn-lt"/>
+                <a:ea typeface="+mn-ea"/>
+                <a:cs typeface="+mn-cs"/>
+              </a:defRPr>
+            </a:lvl4pPr>
+            <a:lvl5pPr marL="1828800" algn="l" defTabSz="914400" rtl="0" eaLnBrk="1" latinLnBrk="0" hangingPunct="1">
+              <a:defRPr sz="1800" kern="1200">
+                <a:solidFill>
+                  <a:schemeClr val="tx1"/>
+                </a:solidFill>
+                <a:latin typeface="+mn-lt"/>
+                <a:ea typeface="+mn-ea"/>
+                <a:cs typeface="+mn-cs"/>
+              </a:defRPr>
+            </a:lvl5pPr>
+            <a:lvl6pPr marL="2286000" algn="l" defTabSz="914400" rtl="0" eaLnBrk="1" latinLnBrk="0" hangingPunct="1">
+              <a:defRPr sz="1800" kern="1200">
+                <a:solidFill>
+                  <a:schemeClr val="tx1"/>
+                </a:solidFill>
+                <a:latin typeface="+mn-lt"/>
+                <a:ea typeface="+mn-ea"/>
+                <a:cs typeface="+mn-cs"/>
+              </a:defRPr>
+            </a:lvl6pPr>
+            <a:lvl7pPr marL="2743200" algn="l" defTabSz="914400" rtl="0" eaLnBrk="1" latinLnBrk="0" hangingPunct="1">
+              <a:defRPr sz="1800" kern="1200">
+                <a:solidFill>
+                  <a:schemeClr val="tx1"/>
+                </a:solidFill>
+                <a:latin typeface="+mn-lt"/>
+                <a:ea typeface="+mn-ea"/>
+                <a:cs typeface="+mn-cs"/>
+              </a:defRPr>
+            </a:lvl7pPr>
+            <a:lvl8pPr marL="3200400" algn="l" defTabSz="914400" rtl="0" eaLnBrk="1" latinLnBrk="0" hangingPunct="1">
+              <a:defRPr sz="1800" kern="1200">
+                <a:solidFill>
+                  <a:schemeClr val="tx1"/>
+                </a:solidFill>
+                <a:latin typeface="+mn-lt"/>
+                <a:ea typeface="+mn-ea"/>
+                <a:cs typeface="+mn-cs"/>
+              </a:defRPr>
+            </a:lvl8pPr>
+            <a:lvl9pPr marL="3657600" algn="l" defTabSz="914400" rtl="0" eaLnBrk="1" latinLnBrk="0" hangingPunct="1">
+              <a:defRPr sz="1800" kern="1200">
+                <a:solidFill>
+                  <a:schemeClr val="tx1"/>
+                </a:solidFill>
+                <a:latin typeface="+mn-lt"/>
+                <a:ea typeface="+mn-ea"/>
+                <a:cs typeface="+mn-cs"/>
+              </a:defRPr>
+            </a:lvl9pPr>
+          </a:lstStyle>
+          <a:p>
+            <a:pPr marL="0" marR="0" lvl="0" indent="0" algn="ctr" defTabSz="914400" rtl="0" eaLnBrk="1" fontAlgn="auto" latinLnBrk="0" hangingPunct="1">
+              <a:lnSpc>
+                <a:spcPct val="100000"/>
+              </a:lnSpc>
+              <a:spcBef>
+                <a:spcPts val="0"/>
+              </a:spcBef>
+              <a:spcAft>
+                <a:spcPts val="0"/>
+              </a:spcAft>
+              <a:buClrTx/>
+              <a:buSzTx/>
+              <a:buFontTx/>
+              <a:buNone/>
+              <a:tabLst/>
+              <a:defRPr/>
+            </a:pPr>
+            <a:fld id="{47FEACEE-25B4-4A2D-B147-27296E36371D}" type="slidenum">
+              <a:rPr kumimoji="0" lang="en-US" altLang="zh-CN" sz="1200" u="none" strike="noStrike" kern="1200" cap="none" spc="0" normalizeH="0" baseline="0" smtClean="0">
+                <a:ln>
+                  <a:noFill/>
+                </a:ln>
+                <a:solidFill>
+                  <a:schemeClr val="bg1"/>
+                </a:solidFill>
+                <a:effectLst/>
+                <a:uLnTx/>
+                <a:uFillTx/>
+              </a:rPr>
+              <a:pPr marL="0" marR="0" lvl="0" indent="0" algn="ctr" defTabSz="914400" rtl="0" eaLnBrk="1" fontAlgn="auto" latinLnBrk="0" hangingPunct="1">
+                <a:lnSpc>
+                  <a:spcPct val="100000"/>
+                </a:lnSpc>
+                <a:spcBef>
+                  <a:spcPts val="0"/>
+                </a:spcBef>
+                <a:spcAft>
+                  <a:spcPts val="0"/>
+                </a:spcAft>
+                <a:buClrTx/>
+                <a:buSzTx/>
+                <a:buFontTx/>
+                <a:buNone/>
+                <a:tabLst/>
+                <a:defRPr/>
+              </a:pPr>
+              <a:t>9</a:t>
+            </a:fld>
+            <a:endParaRPr kumimoji="0" lang="en-US" altLang="zh-CN" sz="1200" u="none" strike="noStrike" kern="1200" cap="none" spc="0" normalizeH="0" baseline="0" dirty="0">
+              <a:ln>
+                <a:noFill/>
+              </a:ln>
+              <a:solidFill>
+                <a:schemeClr val="bg1"/>
+              </a:solidFill>
+              <a:effectLst/>
+              <a:uLnTx/>
+              <a:uFillTx/>
+            </a:endParaRPr>
+          </a:p>
+        </p:txBody>
+      </p:sp>
+      <p:sp>
+        <p:nvSpPr>
+          <p:cNvPr id="2" name="Slide Number Placeholder 1">
+            <a:extLst>
+              <a:ext uri="{FF2B5EF4-FFF2-40B4-BE49-F238E27FC236}">
+                <a16:creationId xmlns:a16="http://schemas.microsoft.com/office/drawing/2014/main" id="{2222DE72-77CB-CB24-A4D1-2FAC47307AC9}"/>
+              </a:ext>
+            </a:extLst>
+          </p:cNvPr>
+          <p:cNvSpPr>
+            <a:spLocks noGrp="1"/>
+          </p:cNvSpPr>
+          <p:nvPr>
+            <p:ph type="sldNum" sz="quarter" idx="55"/>
+          </p:nvPr>
+        </p:nvSpPr>
+        <p:spPr/>
+        <p:txBody>
+          <a:bodyPr/>
+          <a:lstStyle/>
+          <a:p>
+            <a:fld id="{47FEACEE-25B4-4A2D-B147-27296E36371D}" type="slidenum">
+              <a:rPr lang="en-US" altLang="zh-CN" noProof="0" smtClean="0"/>
+              <a:pPr/>
+              <a:t>9</a:t>
+            </a:fld>
+            <a:endParaRPr lang="en-US" altLang="zh-CN" noProof="0" dirty="0"/>
+          </a:p>
+        </p:txBody>
+      </p:sp>
+      <p:pic>
+        <p:nvPicPr>
+          <p:cNvPr id="4" name="Picture 3">
+            <a:extLst>
+              <a:ext uri="{FF2B5EF4-FFF2-40B4-BE49-F238E27FC236}">
+                <a16:creationId xmlns:a16="http://schemas.microsoft.com/office/drawing/2014/main" id="{0E711349-552F-AFBF-5390-82AC959C3741}"/>
+              </a:ext>
+            </a:extLst>
+          </p:cNvPr>
+          <p:cNvPicPr>
+            <a:picLocks noChangeAspect="1"/>
+          </p:cNvPicPr>
+          <p:nvPr/>
+        </p:nvPicPr>
+        <p:blipFill>
+          <a:blip r:embed="rId3"/>
+          <a:stretch>
+            <a:fillRect/>
+          </a:stretch>
+        </p:blipFill>
+        <p:spPr>
+          <a:xfrm>
+            <a:off x="1096223" y="2171700"/>
+            <a:ext cx="5312741" cy="2422390"/>
+          </a:xfrm>
+          <a:prstGeom prst="rect">
+            <a:avLst/>
+          </a:prstGeom>
+        </p:spPr>
+      </p:pic>
+    </p:spTree>
+    <p:extLst>
+      <p:ext uri="{BB962C8B-B14F-4D97-AF65-F5344CB8AC3E}">
+        <p14:creationId xmlns:p14="http://schemas.microsoft.com/office/powerpoint/2010/main" val="4182148033"/>
       </p:ext>
     </p:extLst>
   </p:cSld>
@@ -20633,6 +20441,15 @@
 </file>
 
 <file path=customXml/item1.xml><?xml version="1.0" encoding="utf-8"?>
+<?mso-contentType ?>
+<FormTemplates xmlns="http://schemas.microsoft.com/sharepoint/v3/contenttype/forms">
+  <Display>DocumentLibraryForm</Display>
+  <Edit>DocumentLibraryForm</Edit>
+  <New>DocumentLibraryForm</New>
+</FormTemplates>
+</file>
+
+<file path=customXml/item2.xml><?xml version="1.0" encoding="utf-8"?>
 <p:properties xmlns:p="http://schemas.microsoft.com/office/2006/metadata/properties" xmlns:xsi="http://www.w3.org/2001/XMLSchema-instance" xmlns:pc="http://schemas.microsoft.com/office/infopath/2007/PartnerControls">
   <documentManagement>
     <_ip_UnifiedCompliancePolicyUIAction xmlns="http://schemas.microsoft.com/sharepoint/v3" xsi:nil="true"/>
@@ -20650,15 +20467,6 @@
     <MediaServiceKeyPoints xmlns="71af3243-3dd4-4a8d-8c0d-dd76da1f02a5" xsi:nil="true"/>
   </documentManagement>
 </p:properties>
-</file>
-
-<file path=customXml/item2.xml><?xml version="1.0" encoding="utf-8"?>
-<?mso-contentType ?>
-<FormTemplates xmlns="http://schemas.microsoft.com/sharepoint/v3/contenttype/forms">
-  <Display>DocumentLibraryForm</Display>
-  <Edit>DocumentLibraryForm</Edit>
-  <New>DocumentLibraryForm</New>
-</FormTemplates>
 </file>
 
 <file path=customXml/item3.xml><?xml version="1.0" encoding="utf-8"?>
@@ -20980,6 +20788,14 @@
 </file>
 
 <file path=customXml/itemProps1.xml><?xml version="1.0" encoding="utf-8"?>
+<ds:datastoreItem xmlns:ds="http://schemas.openxmlformats.org/officeDocument/2006/customXml" ds:itemID="{B0009351-EDD4-484E-ACD6-D50CCB137637}">
+  <ds:schemaRefs>
+    <ds:schemaRef ds:uri="http://schemas.microsoft.com/sharepoint/v3/contenttype/forms"/>
+  </ds:schemaRefs>
+</ds:datastoreItem>
+</file>
+
+<file path=customXml/itemProps2.xml><?xml version="1.0" encoding="utf-8"?>
 <ds:datastoreItem xmlns:ds="http://schemas.openxmlformats.org/officeDocument/2006/customXml" ds:itemID="{C8DB3C62-858A-4A01-AFEF-21E0BB8CE262}">
   <ds:schemaRefs>
     <ds:schemaRef ds:uri="http://schemas.microsoft.com/office/2006/metadata/properties"/>
@@ -20987,14 +20803,6 @@
     <ds:schemaRef ds:uri="http://schemas.microsoft.com/sharepoint/v3"/>
     <ds:schemaRef ds:uri="71af3243-3dd4-4a8d-8c0d-dd76da1f02a5"/>
     <ds:schemaRef ds:uri="230e9df3-be65-4c73-a93b-d1236ebd677e"/>
-  </ds:schemaRefs>
-</ds:datastoreItem>
-</file>
-
-<file path=customXml/itemProps2.xml><?xml version="1.0" encoding="utf-8"?>
-<ds:datastoreItem xmlns:ds="http://schemas.openxmlformats.org/officeDocument/2006/customXml" ds:itemID="{B0009351-EDD4-484E-ACD6-D50CCB137637}">
-  <ds:schemaRefs>
-    <ds:schemaRef ds:uri="http://schemas.microsoft.com/sharepoint/v3/contenttype/forms"/>
   </ds:schemaRefs>
 </ds:datastoreItem>
 </file>

--- a/presentation/Three-Tier-Cloud-Architecture-Deployment.pptx
+++ b/presentation/Three-Tier-Cloud-Architecture-Deployment.pptx
@@ -16518,7 +16518,7 @@
         </p:spPr>
         <p:txBody>
           <a:bodyPr>
-            <a:normAutofit fontScale="85000" lnSpcReduction="10000"/>
+            <a:normAutofit lnSpcReduction="10000"/>
           </a:bodyPr>
           <a:lstStyle/>
           <a:p>
@@ -16535,15 +16535,6 @@
             <a:r>
               <a:rPr lang="en-US" dirty="0"/>
               <a:t>Replace the bastion host with AWS Systems Manager Session Manager</a:t>
-            </a:r>
-          </a:p>
-          <a:p>
-            <a:pPr marL="585216" lvl="1" indent="0">
-              <a:buNone/>
-            </a:pPr>
-            <a:r>
-              <a:rPr lang="en-US" dirty="0"/>
-              <a:t>Benefits: No inbound ports, no public IP, IAM-based access, smaller attack surface, no SSH key management</a:t>
             </a:r>
           </a:p>
           <a:p>
@@ -16815,7 +16806,7 @@
         </p:spPr>
         <p:txBody>
           <a:bodyPr vert="horz" lIns="91440" tIns="45720" rIns="91440" bIns="45720" rtlCol="0">
-            <a:normAutofit fontScale="92500" lnSpcReduction="20000"/>
+            <a:normAutofit fontScale="92500" lnSpcReduction="10000"/>
           </a:bodyPr>
           <a:lstStyle>
             <a:lvl1pPr marL="512064" indent="-512064" algn="l" defTabSz="914400" rtl="0" eaLnBrk="1" latinLnBrk="0" hangingPunct="1">
@@ -16998,18 +16989,13 @@
             </a:r>
           </a:p>
           <a:p>
-            <a:pPr marL="585216" lvl="1" indent="0">
-              <a:buNone/>
-            </a:pPr>
+            <a:r>
+              <a:rPr lang="en-US"/>
+              <a:t>Add </a:t>
+            </a:r>
             <a:r>
               <a:rPr lang="en-US" dirty="0"/>
-              <a:t>Benefits: Less NAT Gateway Traffic, Lower cost, private AWS Service access</a:t>
-            </a:r>
-          </a:p>
-          <a:p>
-            <a:r>
-              <a:rPr lang="en-US" dirty="0"/>
-              <a:t>Add Auto-scaling </a:t>
+              <a:t>Auto-scaling </a:t>
             </a:r>
             <a:r>
               <a:rPr lang="en-US" dirty="0" err="1"/>
@@ -20441,15 +20427,6 @@
 </file>
 
 <file path=customXml/item1.xml><?xml version="1.0" encoding="utf-8"?>
-<?mso-contentType ?>
-<FormTemplates xmlns="http://schemas.microsoft.com/sharepoint/v3/contenttype/forms">
-  <Display>DocumentLibraryForm</Display>
-  <Edit>DocumentLibraryForm</Edit>
-  <New>DocumentLibraryForm</New>
-</FormTemplates>
-</file>
-
-<file path=customXml/item2.xml><?xml version="1.0" encoding="utf-8"?>
 <p:properties xmlns:p="http://schemas.microsoft.com/office/2006/metadata/properties" xmlns:xsi="http://www.w3.org/2001/XMLSchema-instance" xmlns:pc="http://schemas.microsoft.com/office/infopath/2007/PartnerControls">
   <documentManagement>
     <_ip_UnifiedCompliancePolicyUIAction xmlns="http://schemas.microsoft.com/sharepoint/v3" xsi:nil="true"/>
@@ -20467,6 +20444,15 @@
     <MediaServiceKeyPoints xmlns="71af3243-3dd4-4a8d-8c0d-dd76da1f02a5" xsi:nil="true"/>
   </documentManagement>
 </p:properties>
+</file>
+
+<file path=customXml/item2.xml><?xml version="1.0" encoding="utf-8"?>
+<?mso-contentType ?>
+<FormTemplates xmlns="http://schemas.microsoft.com/sharepoint/v3/contenttype/forms">
+  <Display>DocumentLibraryForm</Display>
+  <Edit>DocumentLibraryForm</Edit>
+  <New>DocumentLibraryForm</New>
+</FormTemplates>
 </file>
 
 <file path=customXml/item3.xml><?xml version="1.0" encoding="utf-8"?>
@@ -20788,14 +20774,6 @@
 </file>
 
 <file path=customXml/itemProps1.xml><?xml version="1.0" encoding="utf-8"?>
-<ds:datastoreItem xmlns:ds="http://schemas.openxmlformats.org/officeDocument/2006/customXml" ds:itemID="{B0009351-EDD4-484E-ACD6-D50CCB137637}">
-  <ds:schemaRefs>
-    <ds:schemaRef ds:uri="http://schemas.microsoft.com/sharepoint/v3/contenttype/forms"/>
-  </ds:schemaRefs>
-</ds:datastoreItem>
-</file>
-
-<file path=customXml/itemProps2.xml><?xml version="1.0" encoding="utf-8"?>
 <ds:datastoreItem xmlns:ds="http://schemas.openxmlformats.org/officeDocument/2006/customXml" ds:itemID="{C8DB3C62-858A-4A01-AFEF-21E0BB8CE262}">
   <ds:schemaRefs>
     <ds:schemaRef ds:uri="http://schemas.microsoft.com/office/2006/metadata/properties"/>
@@ -20803,6 +20781,14 @@
     <ds:schemaRef ds:uri="http://schemas.microsoft.com/sharepoint/v3"/>
     <ds:schemaRef ds:uri="71af3243-3dd4-4a8d-8c0d-dd76da1f02a5"/>
     <ds:schemaRef ds:uri="230e9df3-be65-4c73-a93b-d1236ebd677e"/>
+  </ds:schemaRefs>
+</ds:datastoreItem>
+</file>
+
+<file path=customXml/itemProps2.xml><?xml version="1.0" encoding="utf-8"?>
+<ds:datastoreItem xmlns:ds="http://schemas.openxmlformats.org/officeDocument/2006/customXml" ds:itemID="{B0009351-EDD4-484E-ACD6-D50CCB137637}">
+  <ds:schemaRefs>
+    <ds:schemaRef ds:uri="http://schemas.microsoft.com/sharepoint/v3/contenttype/forms"/>
   </ds:schemaRefs>
 </ds:datastoreItem>
 </file>

--- a/presentation/Three-Tier-Cloud-Architecture-Deployment.pptx
+++ b/presentation/Three-Tier-Cloud-Architecture-Deployment.pptx
@@ -16990,20 +16990,24 @@
           </a:p>
           <a:p>
             <a:r>
-              <a:rPr lang="en-US"/>
+              <a:rPr lang="en-US" dirty="0"/>
               <a:t>Add </a:t>
             </a:r>
             <a:r>
-              <a:rPr lang="en-US" dirty="0"/>
+              <a:rPr lang="en-US"/>
               <a:t>Auto-scaling </a:t>
             </a:r>
             <a:r>
-              <a:rPr lang="en-US" dirty="0" err="1"/>
-              <a:t>por</a:t>
+              <a:rPr lang="en-US" dirty="0"/>
+              <a:t>f</a:t>
+            </a:r>
+            <a:r>
+              <a:rPr lang="en-US"/>
+              <a:t>or </a:t>
             </a:r>
             <a:r>
               <a:rPr lang="en-US" dirty="0"/>
-              <a:t> application tier</a:t>
+              <a:t>application tier</a:t>
             </a:r>
           </a:p>
           <a:p>
@@ -20427,6 +20431,15 @@
 </file>
 
 <file path=customXml/item1.xml><?xml version="1.0" encoding="utf-8"?>
+<?mso-contentType ?>
+<FormTemplates xmlns="http://schemas.microsoft.com/sharepoint/v3/contenttype/forms">
+  <Display>DocumentLibraryForm</Display>
+  <Edit>DocumentLibraryForm</Edit>
+  <New>DocumentLibraryForm</New>
+</FormTemplates>
+</file>
+
+<file path=customXml/item2.xml><?xml version="1.0" encoding="utf-8"?>
 <p:properties xmlns:p="http://schemas.microsoft.com/office/2006/metadata/properties" xmlns:xsi="http://www.w3.org/2001/XMLSchema-instance" xmlns:pc="http://schemas.microsoft.com/office/infopath/2007/PartnerControls">
   <documentManagement>
     <_ip_UnifiedCompliancePolicyUIAction xmlns="http://schemas.microsoft.com/sharepoint/v3" xsi:nil="true"/>
@@ -20444,15 +20457,6 @@
     <MediaServiceKeyPoints xmlns="71af3243-3dd4-4a8d-8c0d-dd76da1f02a5" xsi:nil="true"/>
   </documentManagement>
 </p:properties>
-</file>
-
-<file path=customXml/item2.xml><?xml version="1.0" encoding="utf-8"?>
-<?mso-contentType ?>
-<FormTemplates xmlns="http://schemas.microsoft.com/sharepoint/v3/contenttype/forms">
-  <Display>DocumentLibraryForm</Display>
-  <Edit>DocumentLibraryForm</Edit>
-  <New>DocumentLibraryForm</New>
-</FormTemplates>
 </file>
 
 <file path=customXml/item3.xml><?xml version="1.0" encoding="utf-8"?>
@@ -20774,6 +20778,14 @@
 </file>
 
 <file path=customXml/itemProps1.xml><?xml version="1.0" encoding="utf-8"?>
+<ds:datastoreItem xmlns:ds="http://schemas.openxmlformats.org/officeDocument/2006/customXml" ds:itemID="{B0009351-EDD4-484E-ACD6-D50CCB137637}">
+  <ds:schemaRefs>
+    <ds:schemaRef ds:uri="http://schemas.microsoft.com/sharepoint/v3/contenttype/forms"/>
+  </ds:schemaRefs>
+</ds:datastoreItem>
+</file>
+
+<file path=customXml/itemProps2.xml><?xml version="1.0" encoding="utf-8"?>
 <ds:datastoreItem xmlns:ds="http://schemas.openxmlformats.org/officeDocument/2006/customXml" ds:itemID="{C8DB3C62-858A-4A01-AFEF-21E0BB8CE262}">
   <ds:schemaRefs>
     <ds:schemaRef ds:uri="http://schemas.microsoft.com/office/2006/metadata/properties"/>
@@ -20781,14 +20793,6 @@
     <ds:schemaRef ds:uri="http://schemas.microsoft.com/sharepoint/v3"/>
     <ds:schemaRef ds:uri="71af3243-3dd4-4a8d-8c0d-dd76da1f02a5"/>
     <ds:schemaRef ds:uri="230e9df3-be65-4c73-a93b-d1236ebd677e"/>
-  </ds:schemaRefs>
-</ds:datastoreItem>
-</file>
-
-<file path=customXml/itemProps2.xml><?xml version="1.0" encoding="utf-8"?>
-<ds:datastoreItem xmlns:ds="http://schemas.openxmlformats.org/officeDocument/2006/customXml" ds:itemID="{B0009351-EDD4-484E-ACD6-D50CCB137637}">
-  <ds:schemaRefs>
-    <ds:schemaRef ds:uri="http://schemas.microsoft.com/sharepoint/v3/contenttype/forms"/>
   </ds:schemaRefs>
 </ds:datastoreItem>
 </file>
